--- a/lecons/F5/31_F5_M3_L28_Basic_Notions_on_Population.pptx
+++ b/lecons/F5/31_F5_M3_L28_Basic_Notions_on_Population.pptx
@@ -13154,7 +13154,7 @@
               <a:buNone/>
             </a:pPr>
             <a:r>
-              <a:rPr lang="en-US" sz="4000" b="1" dirty="0">
+              <a:rPr lang="en-US" sz="3200" b="1" dirty="0">
                 <a:solidFill>
                   <a:srgbClr val="111111"/>
                 </a:solidFill>
@@ -13164,7 +13164,7 @@
               </a:rPr>
               <a:t>Topic: The Dynamics of Population and Implications</a:t>
             </a:r>
-            <a:endParaRPr lang="en-US" sz="4000" dirty="0"/>
+            <a:endParaRPr lang="en-US" sz="3200" dirty="0"/>
           </a:p>
           <a:p>
             <a:pPr algn="l" indent="0" marL="0">
@@ -13174,7 +13174,7 @@
               <a:buNone/>
             </a:pPr>
             <a:r>
-              <a:rPr lang="en-US" sz="4000" b="1" dirty="0">
+              <a:rPr lang="en-US" sz="3200" b="1" dirty="0">
                 <a:solidFill>
                   <a:srgbClr val="111111"/>
                 </a:solidFill>
@@ -13184,7 +13184,7 @@
               </a:rPr>
               <a:t>Sub-topic: Population and Population Distribution</a:t>
             </a:r>
-            <a:endParaRPr lang="en-US" sz="4000" dirty="0"/>
+            <a:endParaRPr lang="en-US" sz="3200" dirty="0"/>
           </a:p>
           <a:p>
             <a:pPr algn="l" indent="0" marL="0">
@@ -13194,7 +13194,7 @@
               <a:buNone/>
             </a:pPr>
             <a:r>
-              <a:rPr lang="en-US" sz="4000" b="1" dirty="0">
+              <a:rPr lang="en-US" sz="3200" b="1" dirty="0">
                 <a:solidFill>
                   <a:srgbClr val="990011"/>
                 </a:solidFill>
@@ -13204,7 +13204,7 @@
               </a:rPr>
               <a:t>Lesson 28: Basic Notions on Population</a:t>
             </a:r>
-            <a:endParaRPr lang="en-US" sz="4000" dirty="0"/>
+            <a:endParaRPr lang="en-US" sz="3200" dirty="0"/>
           </a:p>
         </p:txBody>
       </p:sp>

--- a/lecons/F5/31_F5_M3_L28_Basic_Notions_on_Population.pptx
+++ b/lecons/F5/31_F5_M3_L28_Basic_Notions_on_Population.pptx
@@ -55,9 +55,11 @@
     <p:sldId id="303" r:id="rId49"/>
     <p:sldId id="304" r:id="rId50"/>
     <p:sldId id="305" r:id="rId51"/>
+    <p:sldId id="306" r:id="rId52"/>
+    <p:sldId id="307" r:id="rId53"/>
   </p:sldIdLst>
   <p:notesMasterIdLst>
-    <p:notesMasterId r:id="rId52"/>
+    <p:notesMasterId r:id="rId54"/>
   </p:notesMasterIdLst>
   <p:sldSz cx="12192000" cy="6858000"/>
   <p:notesSz cx="6858000" cy="12192000"/>
@@ -3103,7 +3105,7 @@
           <a:p>
             <a:r>
               <a:rPr lang="en-US" dirty="0"/>
-              <a:t>Let us copy Evolution of the World Population. The world population evolved as follows. On this slide we have Before 1800 and 1800 to 1950. Write each point on a new line, with the key term first, and explain it in your own words when we revise. When you finish, we go to the next slide.</a:t>
+              <a:t>Let us copy Stages of Growth. The world population evolved in the following stages. On this slide we have Before 1800 and 1800 to 1950. Write each point on a new line, with the key term first, and explain it in your own words when we revise. When you finish, we go to the next slide.</a:t>
             </a:r>
             <a:endParaRPr lang="en-US" dirty="0"/>
           </a:p>
@@ -3191,7 +3193,7 @@
           <a:p>
             <a:r>
               <a:rPr lang="en-US" dirty="0"/>
-              <a:t>We continue with Evolution of the World Population. On this slide we have Since 1950 and Causes. Write each point on a new line, with the key term first, and explain it in your own words when we revise.</a:t>
+              <a:t>We continue with Stages of Growth. On this slide we have Since 1950. Write each point on a new line, with the key term first, and explain it in your own words when we revise.</a:t>
             </a:r>
             <a:endParaRPr lang="en-US" dirty="0"/>
           </a:p>
@@ -3279,7 +3281,7 @@
           <a:p>
             <a:r>
               <a:rPr lang="en-US" dirty="0"/>
-              <a:t>Now draw this illustration in your notebook: growth of the world population. Give it a title and label it clearly.</a:t>
+              <a:t>Let us copy Causes of Rapid Growth. Death rates fell, and the population grew fast, for the following reasons. On this slide we have Medicine and Vaccines. Write each point on a new line, with the key term first, and explain it in your own words when we revise. When you finish, we go to the next slide.</a:t>
             </a:r>
             <a:endParaRPr lang="en-US" dirty="0"/>
           </a:p>
@@ -3367,7 +3369,7 @@
           <a:p>
             <a:r>
               <a:rPr lang="en-US" dirty="0"/>
-              <a:t>Now let us check what you have understood. Question 1: Define population. Answer in your exercise book.</a:t>
+              <a:t>We continue with Causes of Rapid Growth. On this slide we have More food. Write each point on a new line, with the key term first, and explain it in your own words when we revise.</a:t>
             </a:r>
             <a:endParaRPr lang="en-US" dirty="0"/>
           </a:p>
@@ -3543,7 +3545,7 @@
           <a:p>
             <a:r>
               <a:rPr lang="en-US" dirty="0"/>
-              <a:t>The expected answer is: the total number of people in an area at a given time. If you got it right, well done.</a:t>
+              <a:t>Now draw this illustration in your notebook: growth of the world population. Give it a title and label it clearly.</a:t>
             </a:r>
             <a:endParaRPr lang="en-US" dirty="0"/>
           </a:p>
@@ -3631,7 +3633,7 @@
           <a:p>
             <a:r>
               <a:rPr lang="en-US" dirty="0"/>
-              <a:t>Now let us check what you have understood. Question 2: Give one cause of rapid growth since 1950. Answer in your exercise book.</a:t>
+              <a:t>Now let us check what you have understood. Question 1: Define population. Answer in your exercise book.</a:t>
             </a:r>
             <a:endParaRPr lang="en-US" dirty="0"/>
           </a:p>
@@ -3719,7 +3721,7 @@
           <a:p>
             <a:r>
               <a:rPr lang="en-US" dirty="0"/>
-              <a:t>The expected answer is: falling death rates due to medicine. If you got it right, well done.</a:t>
+              <a:t>The expected answer is: the total number of people in an area at a given time. If you got it right, well done.</a:t>
             </a:r>
             <a:endParaRPr lang="en-US" dirty="0"/>
           </a:p>
@@ -3807,7 +3809,7 @@
           <a:p>
             <a:r>
               <a:rPr lang="en-US" dirty="0"/>
-              <a:t>For those who need more practice, fill in the blanks in your exercise book. The answers are: number 1, demography; number 2, eight (8); number 3, death.</a:t>
+              <a:t>Now let us check what you have understood. Question 2: Give one cause of rapid growth since 1950. Answer in your exercise book.</a:t>
             </a:r>
             <a:endParaRPr lang="en-US" dirty="0"/>
           </a:p>
@@ -3895,7 +3897,7 @@
           <a:p>
             <a:r>
               <a:rPr lang="en-US" dirty="0"/>
-              <a:t>For your homework: Find the population of Cameroon in the censuses of 1976, 1987 and 2005. We shall correct it at the beginning of our next lesson.</a:t>
+              <a:t>The expected answer is: falling death rates due to medicine. If you got it right, well done.</a:t>
             </a:r>
             <a:endParaRPr lang="en-US" dirty="0"/>
           </a:p>
@@ -3983,7 +3985,7 @@
           <a:p>
             <a:r>
               <a:rPr lang="en-US" dirty="0"/>
-              <a:t>Our next lesson will be on Further Study 3: Sources of Population Data. Thank you for your attention, and see you next time.</a:t>
+              <a:t>For those who need more practice, fill in the blanks in your exercise book. The answers are: number 1, demography; number 2, eight (8); number 3, death.</a:t>
             </a:r>
             <a:endParaRPr lang="en-US" dirty="0"/>
           </a:p>
@@ -4071,7 +4073,7 @@
           <a:p>
             <a:r>
               <a:rPr lang="en-US" dirty="0"/>
-              <a:t>Let us play the bilingual game. I say a word in English, and you give me the French word. Then we do the reverse.</a:t>
+              <a:t>For your homework: Find the population of Cameroon in the censuses of 1976, 1987 and 2005. We shall correct it at the beginning of our next lesson.</a:t>
             </a:r>
             <a:endParaRPr lang="en-US" dirty="0"/>
           </a:p>
@@ -4159,7 +4161,7 @@
           <a:p>
             <a:r>
               <a:rPr lang="en-US" dirty="0"/>
-              <a:t>I record this information in the official logbook of the class after the lesson.</a:t>
+              <a:t>Our next lesson will be on Further Study 3: Sources of Population Data. Thank you for your attention, and see you next time.</a:t>
             </a:r>
             <a:endParaRPr lang="en-US" dirty="0"/>
           </a:p>
@@ -4247,7 +4249,7 @@
           <a:p>
             <a:r>
               <a:rPr lang="en-US" dirty="0"/>
-              <a:t>I complete the second page of the logbook: the matter taught, the evaluation, the homework and the attendance.</a:t>
+              <a:t>Let us play the bilingual game. I say a word in English, and you give me the French word. Then we do the reverse.</a:t>
             </a:r>
             <a:endParaRPr lang="en-US" dirty="0"/>
           </a:p>
@@ -4335,7 +4337,7 @@
           <a:p>
             <a:r>
               <a:rPr lang="en-US" dirty="0"/>
-              <a:t>This slide is for me, the teacher: it gives the timing of the lesson and what to do if the projector is not available.</a:t>
+              <a:t>I record this information in the official logbook of the class after the lesson.</a:t>
             </a:r>
             <a:endParaRPr lang="en-US" dirty="0"/>
           </a:p>
@@ -4511,7 +4513,7 @@
           <a:p>
             <a:r>
               <a:rPr lang="en-US" dirty="0"/>
-              <a:t>These are the references and picture credits used to prepare this lesson.</a:t>
+              <a:t>I complete the second page of the logbook: the matter taught, the evaluation, the homework and the attendance.</a:t>
             </a:r>
             <a:endParaRPr lang="en-US" dirty="0"/>
           </a:p>
@@ -4535,6 +4537,182 @@
             <a:fld id="{F7021451-1387-4CA6-816F-3879F97B5CBC}" type="slidenum">
               <a:rPr lang="en-US"/>
               <a:t>50</a:t>
+            </a:fld>
+            <a:endParaRPr lang="en-US"/>
+          </a:p>
+        </p:txBody>
+      </p:sp>
+    </p:spTree>
+    <p:extLst>
+      <p:ext uri="{BB962C8B-B14F-4D97-AF65-F5344CB8AC3E}">
+        <p14:creationId xmlns:p14="http://schemas.microsoft.com/office/powerpoint/2010/main" val="1024086991"/>
+      </p:ext>
+    </p:extLst>
+  </p:cSld>
+  <p:clrMapOvr>
+    <a:masterClrMapping/>
+  </p:clrMapOvr>
+</p:notes>
+</file>
+
+<file path=ppt/notesSlides/notesSlide51.xml><?xml version="1.0" encoding="utf-8"?>
+<p:notes xmlns:a="http://schemas.openxmlformats.org/drawingml/2006/main" xmlns:r="http://schemas.openxmlformats.org/officeDocument/2006/relationships" xmlns:p="http://schemas.openxmlformats.org/presentationml/2006/main">
+  <p:cSld>
+    <p:spTree>
+      <p:nvGrpSpPr>
+        <p:cNvPr id="1" name=""/>
+        <p:cNvGrpSpPr/>
+        <p:nvPr/>
+      </p:nvGrpSpPr>
+      <p:grpSpPr>
+        <a:xfrm>
+          <a:off x="0" y="0"/>
+          <a:ext cx="0" cy="0"/>
+          <a:chOff x="0" y="0"/>
+          <a:chExt cx="0" cy="0"/>
+        </a:xfrm>
+      </p:grpSpPr>
+      <p:sp>
+        <p:nvSpPr>
+          <p:cNvPr id="2" name="Slide Image Placeholder 1"/>
+          <p:cNvSpPr>
+            <a:spLocks noGrp="1" noRot="1" noChangeAspect="1"/>
+          </p:cNvSpPr>
+          <p:nvPr>
+            <p:ph type="sldImg"/>
+          </p:nvPr>
+        </p:nvSpPr>
+        <p:spPr/>
+      </p:sp>
+      <p:sp>
+        <p:nvSpPr>
+          <p:cNvPr id="3" name="Notes Placeholder 2"/>
+          <p:cNvSpPr>
+            <a:spLocks noGrp="1"/>
+          </p:cNvSpPr>
+          <p:nvPr>
+            <p:ph type="body" idx="1"/>
+          </p:nvPr>
+        </p:nvSpPr>
+        <p:spPr/>
+        <p:txBody>
+          <a:bodyPr/>
+          <a:lstStyle/>
+          <a:p>
+            <a:r>
+              <a:rPr lang="en-US" dirty="0"/>
+              <a:t>This slide is for me, the teacher: it gives the timing of the lesson and what to do if the projector is not available.</a:t>
+            </a:r>
+            <a:endParaRPr lang="en-US" dirty="0"/>
+          </a:p>
+        </p:txBody>
+      </p:sp>
+      <p:sp>
+        <p:nvSpPr>
+          <p:cNvPr id="4" name="Slide Number Placeholder 3"/>
+          <p:cNvSpPr>
+            <a:spLocks noGrp="1"/>
+          </p:cNvSpPr>
+          <p:nvPr>
+            <p:ph type="sldNum" sz="quarter" idx="10"/>
+          </p:nvPr>
+        </p:nvSpPr>
+        <p:spPr/>
+        <p:txBody>
+          <a:bodyPr/>
+          <a:lstStyle/>
+          <a:p>
+            <a:fld id="{F7021451-1387-4CA6-816F-3879F97B5CBC}" type="slidenum">
+              <a:rPr lang="en-US"/>
+              <a:t>51</a:t>
+            </a:fld>
+            <a:endParaRPr lang="en-US"/>
+          </a:p>
+        </p:txBody>
+      </p:sp>
+    </p:spTree>
+    <p:extLst>
+      <p:ext uri="{BB962C8B-B14F-4D97-AF65-F5344CB8AC3E}">
+        <p14:creationId xmlns:p14="http://schemas.microsoft.com/office/powerpoint/2010/main" val="1024086991"/>
+      </p:ext>
+    </p:extLst>
+  </p:cSld>
+  <p:clrMapOvr>
+    <a:masterClrMapping/>
+  </p:clrMapOvr>
+</p:notes>
+</file>
+
+<file path=ppt/notesSlides/notesSlide52.xml><?xml version="1.0" encoding="utf-8"?>
+<p:notes xmlns:a="http://schemas.openxmlformats.org/drawingml/2006/main" xmlns:r="http://schemas.openxmlformats.org/officeDocument/2006/relationships" xmlns:p="http://schemas.openxmlformats.org/presentationml/2006/main">
+  <p:cSld>
+    <p:spTree>
+      <p:nvGrpSpPr>
+        <p:cNvPr id="1" name=""/>
+        <p:cNvGrpSpPr/>
+        <p:nvPr/>
+      </p:nvGrpSpPr>
+      <p:grpSpPr>
+        <a:xfrm>
+          <a:off x="0" y="0"/>
+          <a:ext cx="0" cy="0"/>
+          <a:chOff x="0" y="0"/>
+          <a:chExt cx="0" cy="0"/>
+        </a:xfrm>
+      </p:grpSpPr>
+      <p:sp>
+        <p:nvSpPr>
+          <p:cNvPr id="2" name="Slide Image Placeholder 1"/>
+          <p:cNvSpPr>
+            <a:spLocks noGrp="1" noRot="1" noChangeAspect="1"/>
+          </p:cNvSpPr>
+          <p:nvPr>
+            <p:ph type="sldImg"/>
+          </p:nvPr>
+        </p:nvSpPr>
+        <p:spPr/>
+      </p:sp>
+      <p:sp>
+        <p:nvSpPr>
+          <p:cNvPr id="3" name="Notes Placeholder 2"/>
+          <p:cNvSpPr>
+            <a:spLocks noGrp="1"/>
+          </p:cNvSpPr>
+          <p:nvPr>
+            <p:ph type="body" idx="1"/>
+          </p:nvPr>
+        </p:nvSpPr>
+        <p:spPr/>
+        <p:txBody>
+          <a:bodyPr/>
+          <a:lstStyle/>
+          <a:p>
+            <a:r>
+              <a:rPr lang="en-US" dirty="0"/>
+              <a:t>These are the references and picture credits used to prepare this lesson.</a:t>
+            </a:r>
+            <a:endParaRPr lang="en-US" dirty="0"/>
+          </a:p>
+        </p:txBody>
+      </p:sp>
+      <p:sp>
+        <p:nvSpPr>
+          <p:cNvPr id="4" name="Slide Number Placeholder 3"/>
+          <p:cNvSpPr>
+            <a:spLocks noGrp="1"/>
+          </p:cNvSpPr>
+          <p:nvPr>
+            <p:ph type="sldNum" sz="quarter" idx="10"/>
+          </p:nvPr>
+        </p:nvSpPr>
+        <p:spPr/>
+        <p:txBody>
+          <a:bodyPr/>
+          <a:lstStyle/>
+          <a:p>
+            <a:fld id="{F7021451-1387-4CA6-816F-3879F97B5CBC}" type="slidenum">
+              <a:rPr lang="en-US"/>
+              <a:t>52</a:t>
             </a:fld>
             <a:endParaRPr lang="en-US"/>
           </a:p>
@@ -13686,8 +13864,47 @@
         </p:nvSpPr>
         <p:spPr>
           <a:xfrm>
-            <a:off x="2697480" y="1783080"/>
-            <a:ext cx="9174175" cy="4663440"/>
+            <a:off x="2697480" y="1737360"/>
+            <a:ext cx="9174175" cy="457200"/>
+          </a:xfrm>
+          <a:prstGeom prst="rect">
+            <a:avLst/>
+          </a:prstGeom>
+          <a:noFill/>
+          <a:ln/>
+        </p:spPr>
+        <p:txBody>
+          <a:bodyPr wrap="square" lIns="0" tIns="0" rIns="0" bIns="0" rtlCol="0" anchor="ctr"/>
+          <a:lstStyle/>
+          <a:p>
+            <a:pPr algn="l" indent="0" marL="0">
+              <a:buNone/>
+            </a:pPr>
+            <a:r>
+              <a:rPr lang="en-US" sz="3200" b="1" dirty="0">
+                <a:solidFill>
+                  <a:srgbClr val="990011"/>
+                </a:solidFill>
+                <a:latin typeface="Times New Roman" pitchFamily="34" charset="0"/>
+                <a:ea typeface="Times New Roman" pitchFamily="34" charset="-122"/>
+                <a:cs typeface="Times New Roman" pitchFamily="34" charset="-120"/>
+              </a:rPr>
+              <a:t>A) Stages of Growth</a:t>
+            </a:r>
+            <a:endParaRPr lang="en-US" sz="3200" dirty="0"/>
+          </a:p>
+        </p:txBody>
+      </p:sp>
+      <p:sp>
+        <p:nvSpPr>
+          <p:cNvPr id="6" name="Text 3"/>
+          <p:cNvSpPr/>
+          <p:nvPr/>
+        </p:nvSpPr>
+        <p:spPr>
+          <a:xfrm>
+            <a:off x="2697480" y="2240280"/>
+            <a:ext cx="9174175" cy="4206240"/>
           </a:xfrm>
           <a:prstGeom prst="rect">
             <a:avLst/>
@@ -13714,7 +13931,7 @@
                 <a:ea typeface="Times New Roman" pitchFamily="34" charset="-122"/>
                 <a:cs typeface="Times New Roman" pitchFamily="34" charset="-120"/>
               </a:rPr>
-              <a:t>The world population evolved as follows:</a:t>
+              <a:t>The world population evolved in the following stages:</a:t>
             </a:r>
             <a:endParaRPr lang="en-US" sz="4000" dirty="0"/>
           </a:p>
@@ -13965,7 +14182,7 @@
                 <a:ea typeface="Times New Roman" pitchFamily="34" charset="-122"/>
                 <a:cs typeface="Times New Roman" pitchFamily="34" charset="-120"/>
               </a:rPr>
-              <a:t>1. Evolution of the World Population (continued)</a:t>
+              <a:t>1. Evolution of the World Population</a:t>
             </a:r>
             <a:endParaRPr lang="en-US" sz="3600" dirty="0"/>
           </a:p>
@@ -13979,8 +14196,47 @@
         </p:nvSpPr>
         <p:spPr>
           <a:xfrm>
-            <a:off x="5349240" y="1783080"/>
-            <a:ext cx="6522415" cy="4663440"/>
+            <a:off x="5349240" y="1737360"/>
+            <a:ext cx="6522415" cy="457200"/>
+          </a:xfrm>
+          <a:prstGeom prst="rect">
+            <a:avLst/>
+          </a:prstGeom>
+          <a:noFill/>
+          <a:ln/>
+        </p:spPr>
+        <p:txBody>
+          <a:bodyPr wrap="square" lIns="0" tIns="0" rIns="0" bIns="0" rtlCol="0" anchor="ctr"/>
+          <a:lstStyle/>
+          <a:p>
+            <a:pPr algn="l" indent="0" marL="0">
+              <a:buNone/>
+            </a:pPr>
+            <a:r>
+              <a:rPr lang="en-US" sz="3200" b="1" dirty="0">
+                <a:solidFill>
+                  <a:srgbClr val="990011"/>
+                </a:solidFill>
+                <a:latin typeface="Times New Roman" pitchFamily="34" charset="0"/>
+                <a:ea typeface="Times New Roman" pitchFamily="34" charset="-122"/>
+                <a:cs typeface="Times New Roman" pitchFamily="34" charset="-120"/>
+              </a:rPr>
+              <a:t>A) Stages of Growth (continued)</a:t>
+            </a:r>
+            <a:endParaRPr lang="en-US" sz="3200" dirty="0"/>
+          </a:p>
+        </p:txBody>
+      </p:sp>
+      <p:sp>
+        <p:nvSpPr>
+          <p:cNvPr id="6" name="Text 3"/>
+          <p:cNvSpPr/>
+          <p:nvPr/>
+        </p:nvSpPr>
+        <p:spPr>
+          <a:xfrm>
+            <a:off x="5349240" y="2240280"/>
+            <a:ext cx="6522415" cy="4206240"/>
           </a:xfrm>
           <a:prstGeom prst="rect">
             <a:avLst/>
@@ -14025,43 +14281,6 @@
                 <a:cs typeface="Times New Roman" pitchFamily="34" charset="-120"/>
               </a:rPr>
               <a:t>Growth is very fast, reaching more than 8 billion people today.</a:t>
-            </a:r>
-            <a:endParaRPr lang="en-US" sz="4000" dirty="0"/>
-          </a:p>
-          <a:p>
-            <a:pPr algn="l" indent="0" marL="0">
-              <a:spcAft>
-                <a:spcPts val="800"/>
-              </a:spcAft>
-              <a:buNone/>
-            </a:pPr>
-            <a:r>
-              <a:rPr lang="en-US" sz="4000" b="1" dirty="0">
-                <a:solidFill>
-                  <a:srgbClr val="111111"/>
-                </a:solidFill>
-                <a:latin typeface="Times New Roman" pitchFamily="34" charset="0"/>
-                <a:ea typeface="Times New Roman" pitchFamily="34" charset="-122"/>
-                <a:cs typeface="Times New Roman" pitchFamily="34" charset="-120"/>
-              </a:rPr>
-              <a:t>Causes: </a:t>
-            </a:r>
-            <a:pPr algn="l" indent="0" marL="0">
-              <a:spcAft>
-                <a:spcPts val="800"/>
-              </a:spcAft>
-              <a:buNone/>
-            </a:pPr>
-            <a:r>
-              <a:rPr lang="en-US" sz="4000" dirty="0">
-                <a:solidFill>
-                  <a:srgbClr val="111111"/>
-                </a:solidFill>
-                <a:latin typeface="Times New Roman" pitchFamily="34" charset="0"/>
-                <a:ea typeface="Times New Roman" pitchFamily="34" charset="-122"/>
-                <a:cs typeface="Times New Roman" pitchFamily="34" charset="-120"/>
-              </a:rPr>
-              <a:t>Medicine, vaccines and more food reduced death rates.</a:t>
             </a:r>
             <a:endParaRPr lang="en-US" sz="4000" dirty="0"/>
           </a:p>
@@ -14179,48 +14398,9 @@
           </a:p>
         </p:txBody>
       </p:sp>
-      <p:sp>
-        <p:nvSpPr>
-          <p:cNvPr id="3" name="Text 1"/>
-          <p:cNvSpPr/>
-          <p:nvPr/>
-        </p:nvSpPr>
-        <p:spPr>
-          <a:xfrm>
-            <a:off x="457200" y="1005840"/>
-            <a:ext cx="11277295" cy="731520"/>
-          </a:xfrm>
-          <a:prstGeom prst="rect">
-            <a:avLst/>
-          </a:prstGeom>
-          <a:noFill/>
-          <a:ln/>
-        </p:spPr>
-        <p:txBody>
-          <a:bodyPr wrap="square" lIns="0" tIns="0" rIns="0" bIns="0" rtlCol="0" anchor="ctr"/>
-          <a:lstStyle/>
-          <a:p>
-            <a:pPr algn="ctr" indent="0" marL="0">
-              <a:buNone/>
-            </a:pPr>
-            <a:r>
-              <a:rPr lang="en-US" sz="3600" b="1" dirty="0">
-                <a:solidFill>
-                  <a:srgbClr val="990011"/>
-                </a:solidFill>
-                <a:latin typeface="Times New Roman" pitchFamily="34" charset="0"/>
-                <a:ea typeface="Times New Roman" pitchFamily="34" charset="-122"/>
-                <a:cs typeface="Times New Roman" pitchFamily="34" charset="-120"/>
-              </a:rPr>
-              <a:t>1. Evolution of the World Population</a:t>
-            </a:r>
-            <a:endParaRPr lang="en-US" sz="3600" dirty="0"/>
-          </a:p>
-        </p:txBody>
-      </p:sp>
       <p:pic>
         <p:nvPicPr>
-          <p:cNvPr id="4" name="Image 0" descr="/home/claude/f4/img/v2/world_pop_big.png">    </p:cNvPr>
+          <p:cNvPr id="3" name="Image 0" descr="/home/claude/f4/img/minesec_sheet.png">    </p:cNvPr>
           <p:cNvPicPr>
             <a:picLocks noChangeAspect="1"/>
           </p:cNvPicPr>
@@ -14234,8 +14414,8 @@
         </p:blipFill>
         <p:spPr>
           <a:xfrm>
-            <a:off x="1215564" y="1783080"/>
-            <a:ext cx="9760567" cy="4270248"/>
+            <a:off x="0" y="658368"/>
+            <a:ext cx="2468880" cy="5833872"/>
           </a:xfrm>
           <a:prstGeom prst="rect">
             <a:avLst/>
@@ -14244,14 +14424,14 @@
       </p:pic>
       <p:sp>
         <p:nvSpPr>
-          <p:cNvPr id="5" name="Text 2"/>
+          <p:cNvPr id="4" name="Text 1"/>
           <p:cNvSpPr/>
           <p:nvPr/>
         </p:nvSpPr>
         <p:spPr>
           <a:xfrm>
-            <a:off x="457200" y="6089904"/>
-            <a:ext cx="11277295" cy="347472"/>
+            <a:off x="2697480" y="1005840"/>
+            <a:ext cx="9174175" cy="731520"/>
           </a:xfrm>
           <a:prstGeom prst="rect">
             <a:avLst/>
@@ -14260,24 +14440,181 @@
           <a:ln/>
         </p:spPr>
         <p:txBody>
-          <a:bodyPr wrap="square" lIns="0" tIns="0" rIns="0" bIns="0" rtlCol="0" anchor="ctr"/>
+          <a:bodyPr wrap="square" lIns="0" tIns="0" rIns="0" bIns="0" rtlCol="0" anchor="ctr">
+            <a:normAutofit/>
+          </a:bodyPr>
           <a:lstStyle/>
           <a:p>
             <a:pPr algn="ctr" indent="0" marL="0">
               <a:buNone/>
             </a:pPr>
             <a:r>
-              <a:rPr lang="en-US" sz="1800" i="1" dirty="0">
-                <a:solidFill>
-                  <a:srgbClr val="555555"/>
+              <a:rPr lang="en-US" sz="3600" b="1" dirty="0">
+                <a:solidFill>
+                  <a:srgbClr val="990011"/>
                 </a:solidFill>
                 <a:latin typeface="Times New Roman" pitchFamily="34" charset="0"/>
                 <a:ea typeface="Times New Roman" pitchFamily="34" charset="-122"/>
                 <a:cs typeface="Times New Roman" pitchFamily="34" charset="-120"/>
               </a:rPr>
-              <a:t>Illustration: growth of the world population</a:t>
-            </a:r>
-            <a:endParaRPr lang="en-US" sz="1800" dirty="0"/>
+              <a:t>1. Evolution of the World Population</a:t>
+            </a:r>
+            <a:endParaRPr lang="en-US" sz="3600" dirty="0"/>
+          </a:p>
+        </p:txBody>
+      </p:sp>
+      <p:sp>
+        <p:nvSpPr>
+          <p:cNvPr id="5" name="Text 2"/>
+          <p:cNvSpPr/>
+          <p:nvPr/>
+        </p:nvSpPr>
+        <p:spPr>
+          <a:xfrm>
+            <a:off x="2697480" y="1737360"/>
+            <a:ext cx="9174175" cy="457200"/>
+          </a:xfrm>
+          <a:prstGeom prst="rect">
+            <a:avLst/>
+          </a:prstGeom>
+          <a:noFill/>
+          <a:ln/>
+        </p:spPr>
+        <p:txBody>
+          <a:bodyPr wrap="square" lIns="0" tIns="0" rIns="0" bIns="0" rtlCol="0" anchor="ctr"/>
+          <a:lstStyle/>
+          <a:p>
+            <a:pPr algn="l" indent="0" marL="0">
+              <a:buNone/>
+            </a:pPr>
+            <a:r>
+              <a:rPr lang="en-US" sz="3200" b="1" dirty="0">
+                <a:solidFill>
+                  <a:srgbClr val="990011"/>
+                </a:solidFill>
+                <a:latin typeface="Times New Roman" pitchFamily="34" charset="0"/>
+                <a:ea typeface="Times New Roman" pitchFamily="34" charset="-122"/>
+                <a:cs typeface="Times New Roman" pitchFamily="34" charset="-120"/>
+              </a:rPr>
+              <a:t>B) Causes of Rapid Growth</a:t>
+            </a:r>
+            <a:endParaRPr lang="en-US" sz="3200" dirty="0"/>
+          </a:p>
+        </p:txBody>
+      </p:sp>
+      <p:sp>
+        <p:nvSpPr>
+          <p:cNvPr id="6" name="Text 3"/>
+          <p:cNvSpPr/>
+          <p:nvPr/>
+        </p:nvSpPr>
+        <p:spPr>
+          <a:xfrm>
+            <a:off x="2697480" y="2240280"/>
+            <a:ext cx="9174175" cy="4206240"/>
+          </a:xfrm>
+          <a:prstGeom prst="rect">
+            <a:avLst/>
+          </a:prstGeom>
+          <a:noFill/>
+          <a:ln/>
+        </p:spPr>
+        <p:txBody>
+          <a:bodyPr wrap="square" lIns="0" tIns="0" rIns="0" bIns="0" rtlCol="0" anchor="t"/>
+          <a:lstStyle/>
+          <a:p>
+            <a:pPr algn="l" indent="0" marL="0">
+              <a:spcAft>
+                <a:spcPts val="800"/>
+              </a:spcAft>
+              <a:buNone/>
+            </a:pPr>
+            <a:r>
+              <a:rPr lang="en-US" sz="4000" i="1" dirty="0">
+                <a:solidFill>
+                  <a:srgbClr val="111111"/>
+                </a:solidFill>
+                <a:latin typeface="Times New Roman" pitchFamily="34" charset="0"/>
+                <a:ea typeface="Times New Roman" pitchFamily="34" charset="-122"/>
+                <a:cs typeface="Times New Roman" pitchFamily="34" charset="-120"/>
+              </a:rPr>
+              <a:t>Death rates fell, and the population grew fast, for the following reasons:</a:t>
+            </a:r>
+            <a:endParaRPr lang="en-US" sz="4000" dirty="0"/>
+          </a:p>
+          <a:p>
+            <a:pPr algn="l" indent="0" marL="0">
+              <a:spcAft>
+                <a:spcPts val="800"/>
+              </a:spcAft>
+              <a:buNone/>
+            </a:pPr>
+            <a:r>
+              <a:rPr lang="en-US" sz="4000" b="1" dirty="0">
+                <a:solidFill>
+                  <a:srgbClr val="111111"/>
+                </a:solidFill>
+                <a:latin typeface="Times New Roman" pitchFamily="34" charset="0"/>
+                <a:ea typeface="Times New Roman" pitchFamily="34" charset="-122"/>
+                <a:cs typeface="Times New Roman" pitchFamily="34" charset="-120"/>
+              </a:rPr>
+              <a:t>Medicine: </a:t>
+            </a:r>
+            <a:pPr algn="l" indent="0" marL="0">
+              <a:spcAft>
+                <a:spcPts val="800"/>
+              </a:spcAft>
+              <a:buNone/>
+            </a:pPr>
+            <a:r>
+              <a:rPr lang="en-US" sz="4000" dirty="0">
+                <a:solidFill>
+                  <a:srgbClr val="111111"/>
+                </a:solidFill>
+                <a:latin typeface="Times New Roman" pitchFamily="34" charset="0"/>
+                <a:ea typeface="Times New Roman" pitchFamily="34" charset="-122"/>
+                <a:cs typeface="Times New Roman" pitchFamily="34" charset="-120"/>
+              </a:rPr>
+              <a:t>Hospitals and drugs cure more diseases.</a:t>
+            </a:r>
+            <a:endParaRPr lang="en-US" sz="4000" dirty="0"/>
+          </a:p>
+          <a:p>
+            <a:pPr algn="l" indent="0" marL="0">
+              <a:spcAft>
+                <a:spcPts val="800"/>
+              </a:spcAft>
+              <a:buNone/>
+            </a:pPr>
+            <a:r>
+              <a:rPr lang="en-US" sz="4000" b="1" dirty="0">
+                <a:solidFill>
+                  <a:srgbClr val="111111"/>
+                </a:solidFill>
+                <a:latin typeface="Times New Roman" pitchFamily="34" charset="0"/>
+                <a:ea typeface="Times New Roman" pitchFamily="34" charset="-122"/>
+                <a:cs typeface="Times New Roman" pitchFamily="34" charset="-120"/>
+              </a:rPr>
+              <a:t>Vaccines: </a:t>
+            </a:r>
+            <a:pPr algn="l" indent="0" marL="0">
+              <a:spcAft>
+                <a:spcPts val="800"/>
+              </a:spcAft>
+              <a:buNone/>
+            </a:pPr>
+            <a:r>
+              <a:rPr lang="en-US" sz="4000" dirty="0">
+                <a:solidFill>
+                  <a:srgbClr val="111111"/>
+                </a:solidFill>
+                <a:latin typeface="Times New Roman" pitchFamily="34" charset="0"/>
+                <a:ea typeface="Times New Roman" pitchFamily="34" charset="-122"/>
+                <a:cs typeface="Times New Roman" pitchFamily="34" charset="-120"/>
+              </a:rPr>
+              <a:t>They protect children against deadly diseases.</a:t>
+            </a:r>
+            <a:endParaRPr lang="en-US" sz="4000" dirty="0"/>
           </a:p>
         </p:txBody>
       </p:sp>
@@ -14387,7 +14724,7 @@
                 <a:ea typeface="Calibri" pitchFamily="34" charset="-122"/>
                 <a:cs typeface="Calibri" pitchFamily="34" charset="-120"/>
               </a:rPr>
-              <a:t>FORMATIVE EVALUATION</a:t>
+              <a:t>BOARD SUMMARY</a:t>
             </a:r>
             <a:endParaRPr lang="en-US" sz="1400" dirty="0"/>
           </a:p>
@@ -14452,7 +14789,7 @@
                 <a:ea typeface="Times New Roman" pitchFamily="34" charset="-122"/>
                 <a:cs typeface="Times New Roman" pitchFamily="34" charset="-120"/>
               </a:rPr>
-              <a:t>Evaluation 1</a:t>
+              <a:t>1. Evolution of the World Population</a:t>
             </a:r>
             <a:endParaRPr lang="en-US" sz="3600" dirty="0"/>
           </a:p>
@@ -14466,8 +14803,47 @@
         </p:nvSpPr>
         <p:spPr>
           <a:xfrm>
-            <a:off x="5349240" y="1783080"/>
-            <a:ext cx="6522415" cy="4663440"/>
+            <a:off x="5349240" y="1737360"/>
+            <a:ext cx="6522415" cy="457200"/>
+          </a:xfrm>
+          <a:prstGeom prst="rect">
+            <a:avLst/>
+          </a:prstGeom>
+          <a:noFill/>
+          <a:ln/>
+        </p:spPr>
+        <p:txBody>
+          <a:bodyPr wrap="square" lIns="0" tIns="0" rIns="0" bIns="0" rtlCol="0" anchor="ctr"/>
+          <a:lstStyle/>
+          <a:p>
+            <a:pPr algn="l" indent="0" marL="0">
+              <a:buNone/>
+            </a:pPr>
+            <a:r>
+              <a:rPr lang="en-US" sz="2700" b="1" dirty="0">
+                <a:solidFill>
+                  <a:srgbClr val="990011"/>
+                </a:solidFill>
+                <a:latin typeface="Times New Roman" pitchFamily="34" charset="0"/>
+                <a:ea typeface="Times New Roman" pitchFamily="34" charset="-122"/>
+                <a:cs typeface="Times New Roman" pitchFamily="34" charset="-120"/>
+              </a:rPr>
+              <a:t>B) Causes of Rapid Growth (continued)</a:t>
+            </a:r>
+            <a:endParaRPr lang="en-US" sz="2700" dirty="0"/>
+          </a:p>
+        </p:txBody>
+      </p:sp>
+      <p:sp>
+        <p:nvSpPr>
+          <p:cNvPr id="6" name="Text 3"/>
+          <p:cNvSpPr/>
+          <p:nvPr/>
+        </p:nvSpPr>
+        <p:spPr>
+          <a:xfrm>
+            <a:off x="5349240" y="2240280"/>
+            <a:ext cx="6522415" cy="4206240"/>
           </a:xfrm>
           <a:prstGeom prst="rect">
             <a:avLst/>
@@ -14486,7 +14862,7 @@
               <a:buNone/>
             </a:pPr>
             <a:r>
-              <a:rPr lang="en-US" sz="4000" dirty="0">
+              <a:rPr lang="en-US" sz="4000" b="1" dirty="0">
                 <a:solidFill>
                   <a:srgbClr val="111111"/>
                 </a:solidFill>
@@ -14494,7 +14870,24 @@
                 <a:ea typeface="Times New Roman" pitchFamily="34" charset="-122"/>
                 <a:cs typeface="Times New Roman" pitchFamily="34" charset="-120"/>
               </a:rPr>
-              <a:t>Define population.</a:t>
+              <a:t>More food: </a:t>
+            </a:r>
+            <a:pPr algn="l" indent="0" marL="0">
+              <a:spcAft>
+                <a:spcPts val="800"/>
+              </a:spcAft>
+              <a:buNone/>
+            </a:pPr>
+            <a:r>
+              <a:rPr lang="en-US" sz="4000" dirty="0">
+                <a:solidFill>
+                  <a:srgbClr val="111111"/>
+                </a:solidFill>
+                <a:latin typeface="Times New Roman" pitchFamily="34" charset="0"/>
+                <a:ea typeface="Times New Roman" pitchFamily="34" charset="-122"/>
+                <a:cs typeface="Times New Roman" pitchFamily="34" charset="-120"/>
+              </a:rPr>
+              <a:t>Better farming feeds more people.</a:t>
             </a:r>
             <a:endParaRPr lang="en-US" sz="4000" dirty="0"/>
           </a:p>
@@ -14845,15 +15238,54 @@
                 <a:ea typeface="Calibri" pitchFamily="34" charset="-122"/>
                 <a:cs typeface="Calibri" pitchFamily="34" charset="-120"/>
               </a:rPr>
-              <a:t>FORMATIVE EVALUATION</a:t>
+              <a:t>BOARD SUMMARY</a:t>
             </a:r>
             <a:endParaRPr lang="en-US" sz="1400" dirty="0"/>
+          </a:p>
+        </p:txBody>
+      </p:sp>
+      <p:sp>
+        <p:nvSpPr>
+          <p:cNvPr id="3" name="Text 1"/>
+          <p:cNvSpPr/>
+          <p:nvPr/>
+        </p:nvSpPr>
+        <p:spPr>
+          <a:xfrm>
+            <a:off x="457200" y="1005840"/>
+            <a:ext cx="11277295" cy="731520"/>
+          </a:xfrm>
+          <a:prstGeom prst="rect">
+            <a:avLst/>
+          </a:prstGeom>
+          <a:noFill/>
+          <a:ln/>
+        </p:spPr>
+        <p:txBody>
+          <a:bodyPr wrap="square" lIns="0" tIns="0" rIns="0" bIns="0" rtlCol="0" anchor="ctr"/>
+          <a:lstStyle/>
+          <a:p>
+            <a:pPr algn="ctr" indent="0" marL="0">
+              <a:buNone/>
+            </a:pPr>
+            <a:r>
+              <a:rPr lang="en-US" sz="3600" b="1" dirty="0">
+                <a:solidFill>
+                  <a:srgbClr val="990011"/>
+                </a:solidFill>
+                <a:latin typeface="Times New Roman" pitchFamily="34" charset="0"/>
+                <a:ea typeface="Times New Roman" pitchFamily="34" charset="-122"/>
+                <a:cs typeface="Times New Roman" pitchFamily="34" charset="-120"/>
+              </a:rPr>
+              <a:t>1. Evolution of the World Population</a:t>
+            </a:r>
+            <a:endParaRPr lang="en-US" sz="3600" dirty="0"/>
           </a:p>
         </p:txBody>
       </p:sp>
       <p:pic>
         <p:nvPicPr>
-          <p:cNvPr id="3" name="Image 0" descr="/home/claude/f4/img/minesec_sheet.png">    </p:cNvPr>
+          <p:cNvPr id="4" name="Image 0" descr="/home/claude/f4/img/v2/world_pop_big.png">    </p:cNvPr>
           <p:cNvPicPr>
             <a:picLocks noChangeAspect="1"/>
           </p:cNvPicPr>
@@ -14867,8 +15299,8 @@
         </p:blipFill>
         <p:spPr>
           <a:xfrm>
-            <a:off x="0" y="658368"/>
-            <a:ext cx="5120640" cy="5833872"/>
+            <a:off x="1215564" y="1783080"/>
+            <a:ext cx="9760567" cy="4270248"/>
           </a:xfrm>
           <a:prstGeom prst="rect">
             <a:avLst/>
@@ -14877,14 +15309,14 @@
       </p:pic>
       <p:sp>
         <p:nvSpPr>
-          <p:cNvPr id="4" name="Text 1"/>
+          <p:cNvPr id="5" name="Text 2"/>
           <p:cNvSpPr/>
           <p:nvPr/>
         </p:nvSpPr>
         <p:spPr>
           <a:xfrm>
-            <a:off x="5349240" y="1005840"/>
-            <a:ext cx="6522415" cy="731520"/>
+            <a:off x="457200" y="6089904"/>
+            <a:ext cx="11277295" cy="347472"/>
           </a:xfrm>
           <a:prstGeom prst="rect">
             <a:avLst/>
@@ -14893,68 +15325,24 @@
           <a:ln/>
         </p:spPr>
         <p:txBody>
-          <a:bodyPr wrap="square" lIns="0" tIns="0" rIns="0" bIns="0" rtlCol="0" anchor="ctr">
-            <a:normAutofit/>
-          </a:bodyPr>
+          <a:bodyPr wrap="square" lIns="0" tIns="0" rIns="0" bIns="0" rtlCol="0" anchor="ctr"/>
           <a:lstStyle/>
           <a:p>
             <a:pPr algn="ctr" indent="0" marL="0">
               <a:buNone/>
             </a:pPr>
             <a:r>
-              <a:rPr lang="en-US" sz="3600" b="1" dirty="0">
-                <a:solidFill>
-                  <a:srgbClr val="990011"/>
+              <a:rPr lang="en-US" sz="1800" i="1" dirty="0">
+                <a:solidFill>
+                  <a:srgbClr val="555555"/>
                 </a:solidFill>
                 <a:latin typeface="Times New Roman" pitchFamily="34" charset="0"/>
                 <a:ea typeface="Times New Roman" pitchFamily="34" charset="-122"/>
                 <a:cs typeface="Times New Roman" pitchFamily="34" charset="-120"/>
               </a:rPr>
-              <a:t>Expected Answer</a:t>
-            </a:r>
-            <a:endParaRPr lang="en-US" sz="3600" dirty="0"/>
-          </a:p>
-        </p:txBody>
-      </p:sp>
-      <p:sp>
-        <p:nvSpPr>
-          <p:cNvPr id="5" name="Text 2"/>
-          <p:cNvSpPr/>
-          <p:nvPr/>
-        </p:nvSpPr>
-        <p:spPr>
-          <a:xfrm>
-            <a:off x="5349240" y="1783080"/>
-            <a:ext cx="6522415" cy="4663440"/>
-          </a:xfrm>
-          <a:prstGeom prst="rect">
-            <a:avLst/>
-          </a:prstGeom>
-          <a:noFill/>
-          <a:ln/>
-        </p:spPr>
-        <p:txBody>
-          <a:bodyPr wrap="square" lIns="0" tIns="0" rIns="0" bIns="0" rtlCol="0" anchor="t"/>
-          <a:lstStyle/>
-          <a:p>
-            <a:pPr algn="l" indent="0" marL="0">
-              <a:spcAft>
-                <a:spcPts val="800"/>
-              </a:spcAft>
-              <a:buNone/>
-            </a:pPr>
-            <a:r>
-              <a:rPr lang="en-US" sz="4000" dirty="0">
-                <a:solidFill>
-                  <a:srgbClr val="111111"/>
-                </a:solidFill>
-                <a:latin typeface="Times New Roman" pitchFamily="34" charset="0"/>
-                <a:ea typeface="Times New Roman" pitchFamily="34" charset="-122"/>
-                <a:cs typeface="Times New Roman" pitchFamily="34" charset="-120"/>
-              </a:rPr>
-              <a:t>The total number of people in an area at a given time.</a:t>
-            </a:r>
-            <a:endParaRPr lang="en-US" sz="4000" dirty="0"/>
+              <a:t>Illustration: growth of the world population</a:t>
+            </a:r>
+            <a:endParaRPr lang="en-US" sz="1800" dirty="0"/>
           </a:p>
         </p:txBody>
       </p:sp>
@@ -15129,7 +15517,7 @@
                 <a:ea typeface="Times New Roman" pitchFamily="34" charset="-122"/>
                 <a:cs typeface="Times New Roman" pitchFamily="34" charset="-120"/>
               </a:rPr>
-              <a:t>Evaluation 2</a:t>
+              <a:t>Evaluation 1</a:t>
             </a:r>
             <a:endParaRPr lang="en-US" sz="3600" dirty="0"/>
           </a:p>
@@ -15171,7 +15559,7 @@
                 <a:ea typeface="Times New Roman" pitchFamily="34" charset="-122"/>
                 <a:cs typeface="Times New Roman" pitchFamily="34" charset="-120"/>
               </a:rPr>
-              <a:t>Give one cause of rapid growth since 1950.</a:t>
+              <a:t>Define population.</a:t>
             </a:r>
             <a:endParaRPr lang="en-US" sz="4000" dirty="0"/>
           </a:p>
@@ -15390,7 +15778,7 @@
                 <a:ea typeface="Times New Roman" pitchFamily="34" charset="-122"/>
                 <a:cs typeface="Times New Roman" pitchFamily="34" charset="-120"/>
               </a:rPr>
-              <a:t>Falling death rates due to medicine.</a:t>
+              <a:t>The total number of people in an area at a given time.</a:t>
             </a:r>
             <a:endParaRPr lang="en-US" sz="4000" dirty="0"/>
           </a:p>
@@ -15502,7 +15890,7 @@
                 <a:ea typeface="Calibri" pitchFamily="34" charset="-122"/>
                 <a:cs typeface="Calibri" pitchFamily="34" charset="-120"/>
               </a:rPr>
-              <a:t>REMEDIATION</a:t>
+              <a:t>FORMATIVE EVALUATION</a:t>
             </a:r>
             <a:endParaRPr lang="en-US" sz="1400" dirty="0"/>
           </a:p>
@@ -15525,7 +15913,7 @@
         <p:spPr>
           <a:xfrm>
             <a:off x="0" y="658368"/>
-            <a:ext cx="2468880" cy="5833872"/>
+            <a:ext cx="5120640" cy="5833872"/>
           </a:xfrm>
           <a:prstGeom prst="rect">
             <a:avLst/>
@@ -15540,8 +15928,8 @@
         </p:nvSpPr>
         <p:spPr>
           <a:xfrm>
-            <a:off x="2697480" y="1005840"/>
-            <a:ext cx="9174175" cy="731520"/>
+            <a:off x="5349240" y="1005840"/>
+            <a:ext cx="6522415" cy="731520"/>
           </a:xfrm>
           <a:prstGeom prst="rect">
             <a:avLst/>
@@ -15567,7 +15955,7 @@
                 <a:ea typeface="Times New Roman" pitchFamily="34" charset="-122"/>
                 <a:cs typeface="Times New Roman" pitchFamily="34" charset="-120"/>
               </a:rPr>
-              <a:t>Remediation</a:t>
+              <a:t>Evaluation 2</a:t>
             </a:r>
             <a:endParaRPr lang="en-US" sz="3600" dirty="0"/>
           </a:p>
@@ -15581,8 +15969,8 @@
         </p:nvSpPr>
         <p:spPr>
           <a:xfrm>
-            <a:off x="2697480" y="1783080"/>
-            <a:ext cx="9174175" cy="4663440"/>
+            <a:off x="5349240" y="1783080"/>
+            <a:ext cx="6522415" cy="4663440"/>
           </a:xfrm>
           <a:prstGeom prst="rect">
             <a:avLst/>
@@ -15601,7 +15989,7 @@
               <a:buNone/>
             </a:pPr>
             <a:r>
-              <a:rPr lang="en-US" sz="4000" b="1" dirty="0">
+              <a:rPr lang="en-US" sz="4000" dirty="0">
                 <a:solidFill>
                   <a:srgbClr val="111111"/>
                 </a:solidFill>
@@ -15609,73 +15997,7 @@
                 <a:ea typeface="Times New Roman" pitchFamily="34" charset="-122"/>
                 <a:cs typeface="Times New Roman" pitchFamily="34" charset="-120"/>
               </a:rPr>
-              <a:t>Fill in the blanks:</a:t>
-            </a:r>
-            <a:endParaRPr lang="en-US" sz="4000" dirty="0"/>
-          </a:p>
-          <a:p>
-            <a:pPr algn="l" marL="342900" indent="-342900">
-              <a:spcAft>
-                <a:spcPts val="800"/>
-              </a:spcAft>
-              <a:buSzPct val="100000"/>
-              <a:buFont typeface="+mj-lt"/>
-              <a:buAutoNum type="arabicPeriod" startAt="1"/>
-            </a:pPr>
-            <a:r>
-              <a:rPr lang="en-US" sz="4000" dirty="0">
-                <a:solidFill>
-                  <a:srgbClr val="111111"/>
-                </a:solidFill>
-                <a:latin typeface="Times New Roman" pitchFamily="34" charset="0"/>
-                <a:ea typeface="Times New Roman" pitchFamily="34" charset="-122"/>
-                <a:cs typeface="Times New Roman" pitchFamily="34" charset="-120"/>
-              </a:rPr>
-              <a:t>The study of population is ______.</a:t>
-            </a:r>
-            <a:endParaRPr lang="en-US" sz="4000" dirty="0"/>
-          </a:p>
-          <a:p>
-            <a:pPr algn="l" marL="342900" indent="-342900">
-              <a:spcAft>
-                <a:spcPts val="800"/>
-              </a:spcAft>
-              <a:buSzPct val="100000"/>
-              <a:buFont typeface="+mj-lt"/>
-              <a:buAutoNum type="arabicPeriod" startAt="1"/>
-            </a:pPr>
-            <a:r>
-              <a:rPr lang="en-US" sz="4000" dirty="0">
-                <a:solidFill>
-                  <a:srgbClr val="111111"/>
-                </a:solidFill>
-                <a:latin typeface="Times New Roman" pitchFamily="34" charset="0"/>
-                <a:ea typeface="Times New Roman" pitchFamily="34" charset="-122"/>
-                <a:cs typeface="Times New Roman" pitchFamily="34" charset="-120"/>
-              </a:rPr>
-              <a:t>The world population passed ______ billion in 2022.</a:t>
-            </a:r>
-            <a:endParaRPr lang="en-US" sz="4000" dirty="0"/>
-          </a:p>
-          <a:p>
-            <a:pPr algn="l" marL="342900" indent="-342900">
-              <a:spcAft>
-                <a:spcPts val="800"/>
-              </a:spcAft>
-              <a:buSzPct val="100000"/>
-              <a:buFont typeface="+mj-lt"/>
-              <a:buAutoNum type="arabicPeriod" startAt="1"/>
-            </a:pPr>
-            <a:r>
-              <a:rPr lang="en-US" sz="4000" dirty="0">
-                <a:solidFill>
-                  <a:srgbClr val="111111"/>
-                </a:solidFill>
-                <a:latin typeface="Times New Roman" pitchFamily="34" charset="0"/>
-                <a:ea typeface="Times New Roman" pitchFamily="34" charset="-122"/>
-                <a:cs typeface="Times New Roman" pitchFamily="34" charset="-120"/>
-              </a:rPr>
-              <a:t>Vaccines reduced the ______ rate.</a:t>
+              <a:t>Give one cause of rapid growth since 1950.</a:t>
             </a:r>
             <a:endParaRPr lang="en-US" sz="4000" dirty="0"/>
           </a:p>
@@ -15787,7 +16109,7 @@
                 <a:ea typeface="Calibri" pitchFamily="34" charset="-122"/>
                 <a:cs typeface="Calibri" pitchFamily="34" charset="-120"/>
               </a:rPr>
-              <a:t>HOMEWORK</a:t>
+              <a:t>FORMATIVE EVALUATION</a:t>
             </a:r>
             <a:endParaRPr lang="en-US" sz="1400" dirty="0"/>
           </a:p>
@@ -15852,7 +16174,7 @@
                 <a:ea typeface="Times New Roman" pitchFamily="34" charset="-122"/>
                 <a:cs typeface="Times New Roman" pitchFamily="34" charset="-120"/>
               </a:rPr>
-              <a:t>Homework</a:t>
+              <a:t>Expected Answer</a:t>
             </a:r>
             <a:endParaRPr lang="en-US" sz="3600" dirty="0"/>
           </a:p>
@@ -15894,7 +16216,7 @@
                 <a:ea typeface="Times New Roman" pitchFamily="34" charset="-122"/>
                 <a:cs typeface="Times New Roman" pitchFamily="34" charset="-120"/>
               </a:rPr>
-              <a:t>Find the population of Cameroon in the censuses of 1976, 1987 and 2005.</a:t>
+              <a:t>Falling death rates due to medicine.</a:t>
             </a:r>
             <a:endParaRPr lang="en-US" sz="4000" dirty="0"/>
           </a:p>
@@ -16006,7 +16328,7 @@
                 <a:ea typeface="Calibri" pitchFamily="34" charset="-122"/>
                 <a:cs typeface="Calibri" pitchFamily="34" charset="-120"/>
               </a:rPr>
-              <a:t>NEXT LESSON</a:t>
+              <a:t>REMEDIATION</a:t>
             </a:r>
             <a:endParaRPr lang="en-US" sz="1400" dirty="0"/>
           </a:p>
@@ -16029,7 +16351,7 @@
         <p:spPr>
           <a:xfrm>
             <a:off x="0" y="658368"/>
-            <a:ext cx="5120640" cy="5833872"/>
+            <a:ext cx="2468880" cy="5833872"/>
           </a:xfrm>
           <a:prstGeom prst="rect">
             <a:avLst/>
@@ -16044,8 +16366,8 @@
         </p:nvSpPr>
         <p:spPr>
           <a:xfrm>
-            <a:off x="5349240" y="1005840"/>
-            <a:ext cx="6522415" cy="731520"/>
+            <a:off x="2697480" y="1005840"/>
+            <a:ext cx="9174175" cy="731520"/>
           </a:xfrm>
           <a:prstGeom prst="rect">
             <a:avLst/>
@@ -16071,7 +16393,7 @@
                 <a:ea typeface="Times New Roman" pitchFamily="34" charset="-122"/>
                 <a:cs typeface="Times New Roman" pitchFamily="34" charset="-120"/>
               </a:rPr>
-              <a:t>Next Lesson</a:t>
+              <a:t>Remediation</a:t>
             </a:r>
             <a:endParaRPr lang="en-US" sz="3600" dirty="0"/>
           </a:p>
@@ -16085,8 +16407,8 @@
         </p:nvSpPr>
         <p:spPr>
           <a:xfrm>
-            <a:off x="5349240" y="1783080"/>
-            <a:ext cx="6522415" cy="4663440"/>
+            <a:off x="2697480" y="1783080"/>
+            <a:ext cx="9174175" cy="4663440"/>
           </a:xfrm>
           <a:prstGeom prst="rect">
             <a:avLst/>
@@ -16095,10 +16417,10 @@
           <a:ln/>
         </p:spPr>
         <p:txBody>
-          <a:bodyPr wrap="square" lIns="0" tIns="0" rIns="0" bIns="0" rtlCol="0" anchor="ctr"/>
-          <a:lstStyle/>
-          <a:p>
-            <a:pPr algn="ctr" indent="0" marL="0">
+          <a:bodyPr wrap="square" lIns="0" tIns="0" rIns="0" bIns="0" rtlCol="0" anchor="t"/>
+          <a:lstStyle/>
+          <a:p>
+            <a:pPr algn="l" indent="0" marL="0">
               <a:spcAft>
                 <a:spcPts val="800"/>
               </a:spcAft>
@@ -16113,27 +16435,73 @@
                 <a:ea typeface="Times New Roman" pitchFamily="34" charset="-122"/>
                 <a:cs typeface="Times New Roman" pitchFamily="34" charset="-120"/>
               </a:rPr>
-              <a:t>Our next lesson will be on:</a:t>
+              <a:t>Fill in the blanks:</a:t>
             </a:r>
             <a:endParaRPr lang="en-US" sz="4000" dirty="0"/>
           </a:p>
           <a:p>
-            <a:pPr algn="ctr" indent="0" marL="0">
+            <a:pPr algn="l" marL="342900" indent="-342900">
               <a:spcAft>
                 <a:spcPts val="800"/>
               </a:spcAft>
-              <a:buNone/>
+              <a:buSzPct val="100000"/>
+              <a:buFont typeface="+mj-lt"/>
+              <a:buAutoNum type="arabicPeriod" startAt="1"/>
             </a:pPr>
             <a:r>
-              <a:rPr lang="en-US" sz="4000" b="1" dirty="0">
-                <a:solidFill>
-                  <a:srgbClr val="990011"/>
+              <a:rPr lang="en-US" sz="4000" dirty="0">
+                <a:solidFill>
+                  <a:srgbClr val="111111"/>
                 </a:solidFill>
                 <a:latin typeface="Times New Roman" pitchFamily="34" charset="0"/>
                 <a:ea typeface="Times New Roman" pitchFamily="34" charset="-122"/>
                 <a:cs typeface="Times New Roman" pitchFamily="34" charset="-120"/>
               </a:rPr>
-              <a:t>Further Study 3: Sources of Population Data</a:t>
+              <a:t>The study of population is ______.</a:t>
+            </a:r>
+            <a:endParaRPr lang="en-US" sz="4000" dirty="0"/>
+          </a:p>
+          <a:p>
+            <a:pPr algn="l" marL="342900" indent="-342900">
+              <a:spcAft>
+                <a:spcPts val="800"/>
+              </a:spcAft>
+              <a:buSzPct val="100000"/>
+              <a:buFont typeface="+mj-lt"/>
+              <a:buAutoNum type="arabicPeriod" startAt="1"/>
+            </a:pPr>
+            <a:r>
+              <a:rPr lang="en-US" sz="4000" dirty="0">
+                <a:solidFill>
+                  <a:srgbClr val="111111"/>
+                </a:solidFill>
+                <a:latin typeface="Times New Roman" pitchFamily="34" charset="0"/>
+                <a:ea typeface="Times New Roman" pitchFamily="34" charset="-122"/>
+                <a:cs typeface="Times New Roman" pitchFamily="34" charset="-120"/>
+              </a:rPr>
+              <a:t>The world population passed ______ billion in 2022.</a:t>
+            </a:r>
+            <a:endParaRPr lang="en-US" sz="4000" dirty="0"/>
+          </a:p>
+          <a:p>
+            <a:pPr algn="l" marL="342900" indent="-342900">
+              <a:spcAft>
+                <a:spcPts val="800"/>
+              </a:spcAft>
+              <a:buSzPct val="100000"/>
+              <a:buFont typeface="+mj-lt"/>
+              <a:buAutoNum type="arabicPeriod" startAt="1"/>
+            </a:pPr>
+            <a:r>
+              <a:rPr lang="en-US" sz="4000" dirty="0">
+                <a:solidFill>
+                  <a:srgbClr val="111111"/>
+                </a:solidFill>
+                <a:latin typeface="Times New Roman" pitchFamily="34" charset="0"/>
+                <a:ea typeface="Times New Roman" pitchFamily="34" charset="-122"/>
+                <a:cs typeface="Times New Roman" pitchFamily="34" charset="-120"/>
+              </a:rPr>
+              <a:t>Vaccines reduced the ______ rate.</a:t>
             </a:r>
             <a:endParaRPr lang="en-US" sz="4000" dirty="0"/>
           </a:p>
@@ -16245,6 +16613,464 @@
                 <a:ea typeface="Calibri" pitchFamily="34" charset="-122"/>
                 <a:cs typeface="Calibri" pitchFamily="34" charset="-120"/>
               </a:rPr>
+              <a:t>HOMEWORK</a:t>
+            </a:r>
+            <a:endParaRPr lang="en-US" sz="1400" dirty="0"/>
+          </a:p>
+        </p:txBody>
+      </p:sp>
+      <p:pic>
+        <p:nvPicPr>
+          <p:cNvPr id="3" name="Image 0" descr="/home/claude/f4/img/minesec_sheet.png">    </p:cNvPr>
+          <p:cNvPicPr>
+            <a:picLocks noChangeAspect="1"/>
+          </p:cNvPicPr>
+          <p:nvPr/>
+        </p:nvPicPr>
+        <p:blipFill>
+          <a:blip r:embed="rId1"/>
+          <a:stretch>
+            <a:fillRect/>
+          </a:stretch>
+        </p:blipFill>
+        <p:spPr>
+          <a:xfrm>
+            <a:off x="0" y="658368"/>
+            <a:ext cx="5120640" cy="5833872"/>
+          </a:xfrm>
+          <a:prstGeom prst="rect">
+            <a:avLst/>
+          </a:prstGeom>
+        </p:spPr>
+      </p:pic>
+      <p:sp>
+        <p:nvSpPr>
+          <p:cNvPr id="4" name="Text 1"/>
+          <p:cNvSpPr/>
+          <p:nvPr/>
+        </p:nvSpPr>
+        <p:spPr>
+          <a:xfrm>
+            <a:off x="5349240" y="1005840"/>
+            <a:ext cx="6522415" cy="731520"/>
+          </a:xfrm>
+          <a:prstGeom prst="rect">
+            <a:avLst/>
+          </a:prstGeom>
+          <a:noFill/>
+          <a:ln/>
+        </p:spPr>
+        <p:txBody>
+          <a:bodyPr wrap="square" lIns="0" tIns="0" rIns="0" bIns="0" rtlCol="0" anchor="ctr">
+            <a:normAutofit/>
+          </a:bodyPr>
+          <a:lstStyle/>
+          <a:p>
+            <a:pPr algn="ctr" indent="0" marL="0">
+              <a:buNone/>
+            </a:pPr>
+            <a:r>
+              <a:rPr lang="en-US" sz="3600" b="1" dirty="0">
+                <a:solidFill>
+                  <a:srgbClr val="990011"/>
+                </a:solidFill>
+                <a:latin typeface="Times New Roman" pitchFamily="34" charset="0"/>
+                <a:ea typeface="Times New Roman" pitchFamily="34" charset="-122"/>
+                <a:cs typeface="Times New Roman" pitchFamily="34" charset="-120"/>
+              </a:rPr>
+              <a:t>Homework</a:t>
+            </a:r>
+            <a:endParaRPr lang="en-US" sz="3600" dirty="0"/>
+          </a:p>
+        </p:txBody>
+      </p:sp>
+      <p:sp>
+        <p:nvSpPr>
+          <p:cNvPr id="5" name="Text 2"/>
+          <p:cNvSpPr/>
+          <p:nvPr/>
+        </p:nvSpPr>
+        <p:spPr>
+          <a:xfrm>
+            <a:off x="5349240" y="1783080"/>
+            <a:ext cx="6522415" cy="4663440"/>
+          </a:xfrm>
+          <a:prstGeom prst="rect">
+            <a:avLst/>
+          </a:prstGeom>
+          <a:noFill/>
+          <a:ln/>
+        </p:spPr>
+        <p:txBody>
+          <a:bodyPr wrap="square" lIns="0" tIns="0" rIns="0" bIns="0" rtlCol="0" anchor="t"/>
+          <a:lstStyle/>
+          <a:p>
+            <a:pPr algn="l" indent="0" marL="0">
+              <a:spcAft>
+                <a:spcPts val="800"/>
+              </a:spcAft>
+              <a:buNone/>
+            </a:pPr>
+            <a:r>
+              <a:rPr lang="en-US" sz="4000" dirty="0">
+                <a:solidFill>
+                  <a:srgbClr val="111111"/>
+                </a:solidFill>
+                <a:latin typeface="Times New Roman" pitchFamily="34" charset="0"/>
+                <a:ea typeface="Times New Roman" pitchFamily="34" charset="-122"/>
+                <a:cs typeface="Times New Roman" pitchFamily="34" charset="-120"/>
+              </a:rPr>
+              <a:t>Find the population of Cameroon in the censuses of 1976, 1987 and 2005.</a:t>
+            </a:r>
+            <a:endParaRPr lang="en-US" sz="4000" dirty="0"/>
+          </a:p>
+        </p:txBody>
+      </p:sp>
+      <p:sp>
+        <p:nvSpPr>
+          <p:cNvPr id="25" name="Slide Number Placeholder 0"/>
+          <p:cNvSpPr>
+            <a:spLocks noGrp="1"/>
+          </p:cNvSpPr>
+          <p:nvPr>
+            <p:ph type="sldNum" sz="quarter" idx="4294967295"/>
+          </p:nvPr>
+        </p:nvSpPr>
+        <p:spPr>
+          <a:xfrm>
+            <a:off x="27432" y="91440"/>
+            <a:ext cx="585216" cy="475488"/>
+          </a:xfrm>
+          <a:prstGeom prst="rect">
+            <a:avLst/>
+          </a:prstGeom>
+          <a:extLst>
+            <a:ext uri="{C572A759-6A51-4108-AA02-DFA0A04FC94B}">
+              <ma14:wrappingTextBoxFlag xmlns:ma14="http://schemas.microsoft.com/office/mac/drawingml/2011/main" val="0"/>
+            </a:ext>
+          </a:extLst>
+        </p:spPr>
+        <p:txBody>
+          <a:bodyPr/>
+          <a:lstStyle>
+            <a:lvl1pPr>
+              <a:defRPr sz="2000">
+                <a:solidFill>
+                  <a:srgbClr val="FFFFFF"/>
+                </a:solidFill>
+                <a:latin typeface="Calibri"/>
+                <a:ea typeface="Calibri"/>
+                <a:cs typeface="Calibri"/>
+              </a:defRPr>
+            </a:lvl1pPr>
+          </a:lstStyle>
+          <a:p>
+            <a:pPr algn="ctr"/>
+            <a:fld id="{F7021451-1387-4CA6-816F-3879F97B5CBC}" type="slidenum">
+              <a:rPr b="1" lang="en-US"/>
+              <a:t>46</a:t>
+            </a:fld>
+            <a:endParaRPr lang="en-US"/>
+          </a:p>
+        </p:txBody>
+      </p:sp>
+    </p:spTree>
+  </p:cSld>
+  <p:clrMapOvr>
+    <a:masterClrMapping/>
+  </p:clrMapOvr>
+</p:sld>
+</file>
+
+<file path=ppt/slides/slide47.xml><?xml version="1.0" encoding="utf-8"?>
+<p:sld xmlns:a="http://schemas.openxmlformats.org/drawingml/2006/main" xmlns:r="http://schemas.openxmlformats.org/officeDocument/2006/relationships" xmlns:p="http://schemas.openxmlformats.org/presentationml/2006/main">
+  <p:cSld name="Slide 47">
+    <p:spTree>
+      <p:nvGrpSpPr>
+        <p:cNvPr id="1" name=""/>
+        <p:cNvGrpSpPr/>
+        <p:nvPr/>
+      </p:nvGrpSpPr>
+      <p:grpSpPr>
+        <a:xfrm>
+          <a:off x="0" y="0"/>
+          <a:ext cx="0" cy="0"/>
+          <a:chOff x="0" y="0"/>
+          <a:chExt cx="0" cy="0"/>
+        </a:xfrm>
+      </p:grpSpPr>
+      <p:sp>
+        <p:nvSpPr>
+          <p:cNvPr id="2" name="Text 0"/>
+          <p:cNvSpPr/>
+          <p:nvPr/>
+        </p:nvSpPr>
+        <p:spPr>
+          <a:xfrm>
+            <a:off x="457200" y="713232"/>
+            <a:ext cx="11368735" cy="274320"/>
+          </a:xfrm>
+          <a:prstGeom prst="rect">
+            <a:avLst/>
+          </a:prstGeom>
+          <a:noFill/>
+          <a:ln/>
+        </p:spPr>
+        <p:txBody>
+          <a:bodyPr wrap="square" lIns="0" tIns="0" rIns="0" bIns="0" rtlCol="0" anchor="ctr"/>
+          <a:lstStyle/>
+          <a:p>
+            <a:pPr algn="r" indent="0" marL="0">
+              <a:buNone/>
+            </a:pPr>
+            <a:r>
+              <a:rPr lang="en-US" sz="1400" b="1" dirty="0">
+                <a:solidFill>
+                  <a:srgbClr val="1C3F6E"/>
+                </a:solidFill>
+                <a:latin typeface="Calibri" pitchFamily="34" charset="0"/>
+                <a:ea typeface="Calibri" pitchFamily="34" charset="-122"/>
+                <a:cs typeface="Calibri" pitchFamily="34" charset="-120"/>
+              </a:rPr>
+              <a:t>NEXT LESSON</a:t>
+            </a:r>
+            <a:endParaRPr lang="en-US" sz="1400" dirty="0"/>
+          </a:p>
+        </p:txBody>
+      </p:sp>
+      <p:pic>
+        <p:nvPicPr>
+          <p:cNvPr id="3" name="Image 0" descr="/home/claude/f4/img/minesec_sheet.png">    </p:cNvPr>
+          <p:cNvPicPr>
+            <a:picLocks noChangeAspect="1"/>
+          </p:cNvPicPr>
+          <p:nvPr/>
+        </p:nvPicPr>
+        <p:blipFill>
+          <a:blip r:embed="rId1"/>
+          <a:stretch>
+            <a:fillRect/>
+          </a:stretch>
+        </p:blipFill>
+        <p:spPr>
+          <a:xfrm>
+            <a:off x="0" y="658368"/>
+            <a:ext cx="5120640" cy="5833872"/>
+          </a:xfrm>
+          <a:prstGeom prst="rect">
+            <a:avLst/>
+          </a:prstGeom>
+        </p:spPr>
+      </p:pic>
+      <p:sp>
+        <p:nvSpPr>
+          <p:cNvPr id="4" name="Text 1"/>
+          <p:cNvSpPr/>
+          <p:nvPr/>
+        </p:nvSpPr>
+        <p:spPr>
+          <a:xfrm>
+            <a:off x="5349240" y="1005840"/>
+            <a:ext cx="6522415" cy="731520"/>
+          </a:xfrm>
+          <a:prstGeom prst="rect">
+            <a:avLst/>
+          </a:prstGeom>
+          <a:noFill/>
+          <a:ln/>
+        </p:spPr>
+        <p:txBody>
+          <a:bodyPr wrap="square" lIns="0" tIns="0" rIns="0" bIns="0" rtlCol="0" anchor="ctr">
+            <a:normAutofit/>
+          </a:bodyPr>
+          <a:lstStyle/>
+          <a:p>
+            <a:pPr algn="ctr" indent="0" marL="0">
+              <a:buNone/>
+            </a:pPr>
+            <a:r>
+              <a:rPr lang="en-US" sz="3600" b="1" dirty="0">
+                <a:solidFill>
+                  <a:srgbClr val="990011"/>
+                </a:solidFill>
+                <a:latin typeface="Times New Roman" pitchFamily="34" charset="0"/>
+                <a:ea typeface="Times New Roman" pitchFamily="34" charset="-122"/>
+                <a:cs typeface="Times New Roman" pitchFamily="34" charset="-120"/>
+              </a:rPr>
+              <a:t>Next Lesson</a:t>
+            </a:r>
+            <a:endParaRPr lang="en-US" sz="3600" dirty="0"/>
+          </a:p>
+        </p:txBody>
+      </p:sp>
+      <p:sp>
+        <p:nvSpPr>
+          <p:cNvPr id="5" name="Text 2"/>
+          <p:cNvSpPr/>
+          <p:nvPr/>
+        </p:nvSpPr>
+        <p:spPr>
+          <a:xfrm>
+            <a:off x="5349240" y="1783080"/>
+            <a:ext cx="6522415" cy="4663440"/>
+          </a:xfrm>
+          <a:prstGeom prst="rect">
+            <a:avLst/>
+          </a:prstGeom>
+          <a:noFill/>
+          <a:ln/>
+        </p:spPr>
+        <p:txBody>
+          <a:bodyPr wrap="square" lIns="0" tIns="0" rIns="0" bIns="0" rtlCol="0" anchor="ctr"/>
+          <a:lstStyle/>
+          <a:p>
+            <a:pPr algn="ctr" indent="0" marL="0">
+              <a:spcAft>
+                <a:spcPts val="800"/>
+              </a:spcAft>
+              <a:buNone/>
+            </a:pPr>
+            <a:r>
+              <a:rPr lang="en-US" sz="4000" b="1" dirty="0">
+                <a:solidFill>
+                  <a:srgbClr val="111111"/>
+                </a:solidFill>
+                <a:latin typeface="Times New Roman" pitchFamily="34" charset="0"/>
+                <a:ea typeface="Times New Roman" pitchFamily="34" charset="-122"/>
+                <a:cs typeface="Times New Roman" pitchFamily="34" charset="-120"/>
+              </a:rPr>
+              <a:t>Our next lesson will be on:</a:t>
+            </a:r>
+            <a:endParaRPr lang="en-US" sz="4000" dirty="0"/>
+          </a:p>
+          <a:p>
+            <a:pPr algn="ctr" indent="0" marL="0">
+              <a:spcAft>
+                <a:spcPts val="800"/>
+              </a:spcAft>
+              <a:buNone/>
+            </a:pPr>
+            <a:r>
+              <a:rPr lang="en-US" sz="4000" b="1" dirty="0">
+                <a:solidFill>
+                  <a:srgbClr val="990011"/>
+                </a:solidFill>
+                <a:latin typeface="Times New Roman" pitchFamily="34" charset="0"/>
+                <a:ea typeface="Times New Roman" pitchFamily="34" charset="-122"/>
+                <a:cs typeface="Times New Roman" pitchFamily="34" charset="-120"/>
+              </a:rPr>
+              <a:t>Further Study 3: Sources of Population Data</a:t>
+            </a:r>
+            <a:endParaRPr lang="en-US" sz="4000" dirty="0"/>
+          </a:p>
+        </p:txBody>
+      </p:sp>
+      <p:sp>
+        <p:nvSpPr>
+          <p:cNvPr id="25" name="Slide Number Placeholder 0"/>
+          <p:cNvSpPr>
+            <a:spLocks noGrp="1"/>
+          </p:cNvSpPr>
+          <p:nvPr>
+            <p:ph type="sldNum" sz="quarter" idx="4294967295"/>
+          </p:nvPr>
+        </p:nvSpPr>
+        <p:spPr>
+          <a:xfrm>
+            <a:off x="27432" y="91440"/>
+            <a:ext cx="585216" cy="475488"/>
+          </a:xfrm>
+          <a:prstGeom prst="rect">
+            <a:avLst/>
+          </a:prstGeom>
+          <a:extLst>
+            <a:ext uri="{C572A759-6A51-4108-AA02-DFA0A04FC94B}">
+              <ma14:wrappingTextBoxFlag xmlns:ma14="http://schemas.microsoft.com/office/mac/drawingml/2011/main" val="0"/>
+            </a:ext>
+          </a:extLst>
+        </p:spPr>
+        <p:txBody>
+          <a:bodyPr/>
+          <a:lstStyle>
+            <a:lvl1pPr>
+              <a:defRPr sz="2000">
+                <a:solidFill>
+                  <a:srgbClr val="FFFFFF"/>
+                </a:solidFill>
+                <a:latin typeface="Calibri"/>
+                <a:ea typeface="Calibri"/>
+                <a:cs typeface="Calibri"/>
+              </a:defRPr>
+            </a:lvl1pPr>
+          </a:lstStyle>
+          <a:p>
+            <a:pPr algn="ctr"/>
+            <a:fld id="{F7021451-1387-4CA6-816F-3879F97B5CBC}" type="slidenum">
+              <a:rPr b="1" lang="en-US"/>
+              <a:t>47</a:t>
+            </a:fld>
+            <a:endParaRPr lang="en-US"/>
+          </a:p>
+        </p:txBody>
+      </p:sp>
+    </p:spTree>
+  </p:cSld>
+  <p:clrMapOvr>
+    <a:masterClrMapping/>
+  </p:clrMapOvr>
+</p:sld>
+</file>
+
+<file path=ppt/slides/slide48.xml><?xml version="1.0" encoding="utf-8"?>
+<p:sld xmlns:a="http://schemas.openxmlformats.org/drawingml/2006/main" xmlns:r="http://schemas.openxmlformats.org/officeDocument/2006/relationships" xmlns:p="http://schemas.openxmlformats.org/presentationml/2006/main">
+  <p:cSld name="Slide 48">
+    <p:spTree>
+      <p:nvGrpSpPr>
+        <p:cNvPr id="1" name=""/>
+        <p:cNvGrpSpPr/>
+        <p:nvPr/>
+      </p:nvGrpSpPr>
+      <p:grpSpPr>
+        <a:xfrm>
+          <a:off x="0" y="0"/>
+          <a:ext cx="0" cy="0"/>
+          <a:chOff x="0" y="0"/>
+          <a:chExt cx="0" cy="0"/>
+        </a:xfrm>
+      </p:grpSpPr>
+      <p:sp>
+        <p:nvSpPr>
+          <p:cNvPr id="2" name="Text 0"/>
+          <p:cNvSpPr/>
+          <p:nvPr/>
+        </p:nvSpPr>
+        <p:spPr>
+          <a:xfrm>
+            <a:off x="457200" y="713232"/>
+            <a:ext cx="11368735" cy="274320"/>
+          </a:xfrm>
+          <a:prstGeom prst="rect">
+            <a:avLst/>
+          </a:prstGeom>
+          <a:noFill/>
+          <a:ln/>
+        </p:spPr>
+        <p:txBody>
+          <a:bodyPr wrap="square" lIns="0" tIns="0" rIns="0" bIns="0" rtlCol="0" anchor="ctr"/>
+          <a:lstStyle/>
+          <a:p>
+            <a:pPr algn="r" indent="0" marL="0">
+              <a:buNone/>
+            </a:pPr>
+            <a:r>
+              <a:rPr lang="en-US" sz="1400" b="1" dirty="0">
+                <a:solidFill>
+                  <a:srgbClr val="1C3F6E"/>
+                </a:solidFill>
+                <a:latin typeface="Calibri" pitchFamily="34" charset="0"/>
+                <a:ea typeface="Calibri" pitchFamily="34" charset="-122"/>
+                <a:cs typeface="Calibri" pitchFamily="34" charset="-120"/>
+              </a:rPr>
               <a:t>BILINGUAL GAME</a:t>
             </a:r>
             <a:endParaRPr lang="en-US" sz="1400" dirty="0"/>
@@ -16292,7 +17118,7 @@
       </p:sp>
       <p:graphicFrame>
         <p:nvGraphicFramePr>
-          <p:cNvPr id="47" name="Table 0"/>
+          <p:cNvPr id="49" name="Table 0"/>
           <p:cNvGraphicFramePr>
             <a:graphicFrameLocks noGrp="1"/>
           </p:cNvGraphicFramePr>
@@ -17328,7 +18154,7 @@
             <a:pPr algn="ctr"/>
             <a:fld id="{F7021451-1387-4CA6-816F-3879F97B5CBC}" type="slidenum">
               <a:rPr b="1" lang="en-US"/>
-              <a:t>46</a:t>
+              <a:t>48</a:t>
             </a:fld>
             <a:endParaRPr lang="en-US"/>
           </a:p>
@@ -17342,9 +18168,9 @@
 </p:sld>
 </file>
 
-<file path=ppt/slides/slide47.xml><?xml version="1.0" encoding="utf-8"?>
+<file path=ppt/slides/slide49.xml><?xml version="1.0" encoding="utf-8"?>
 <p:sld xmlns:a="http://schemas.openxmlformats.org/drawingml/2006/main" xmlns:r="http://schemas.openxmlformats.org/officeDocument/2006/relationships" xmlns:p="http://schemas.openxmlformats.org/presentationml/2006/main">
-  <p:cSld name="Slide 47">
+  <p:cSld name="Slide 49">
     <p:spTree>
       <p:nvGrpSpPr>
         <p:cNvPr id="1" name=""/>
@@ -17439,7 +18265,7 @@
       </p:sp>
       <p:graphicFrame>
         <p:nvGraphicFramePr>
-          <p:cNvPr id="48" name="Table 0"/>
+          <p:cNvPr id="50" name="Table 0"/>
           <p:cNvGraphicFramePr>
             <a:graphicFrameLocks noGrp="1"/>
           </p:cNvGraphicFramePr>
@@ -18061,7 +18887,7 @@
             <a:pPr algn="ctr"/>
             <a:fld id="{F7021451-1387-4CA6-816F-3879F97B5CBC}" type="slidenum">
               <a:rPr b="1" lang="en-US"/>
-              <a:t>47</a:t>
+              <a:t>49</a:t>
             </a:fld>
             <a:endParaRPr lang="en-US"/>
           </a:p>
@@ -18075,9 +18901,9 @@
 </p:sld>
 </file>
 
-<file path=ppt/slides/slide48.xml><?xml version="1.0" encoding="utf-8"?>
+<file path=ppt/slides/slide5.xml><?xml version="1.0" encoding="utf-8"?>
 <p:sld xmlns:a="http://schemas.openxmlformats.org/drawingml/2006/main" xmlns:r="http://schemas.openxmlformats.org/officeDocument/2006/relationships" xmlns:p="http://schemas.openxmlformats.org/presentationml/2006/main">
-  <p:cSld name="Slide 48">
+  <p:cSld name="Slide 5">
     <p:spTree>
       <p:nvGrpSpPr>
         <p:cNvPr id="1" name=""/>
@@ -18125,6 +18951,225 @@
                 <a:ea typeface="Calibri" pitchFamily="34" charset="-122"/>
                 <a:cs typeface="Calibri" pitchFamily="34" charset="-120"/>
               </a:rPr>
+              <a:t>HOMEWORK CORRECTION</a:t>
+            </a:r>
+            <a:endParaRPr lang="en-US" sz="1400" dirty="0"/>
+          </a:p>
+        </p:txBody>
+      </p:sp>
+      <p:pic>
+        <p:nvPicPr>
+          <p:cNvPr id="3" name="Image 0" descr="/home/claude/f4/img/minesec_sheet.png">    </p:cNvPr>
+          <p:cNvPicPr>
+            <a:picLocks noChangeAspect="1"/>
+          </p:cNvPicPr>
+          <p:nvPr/>
+        </p:nvPicPr>
+        <p:blipFill>
+          <a:blip r:embed="rId1"/>
+          <a:stretch>
+            <a:fillRect/>
+          </a:stretch>
+        </p:blipFill>
+        <p:spPr>
+          <a:xfrm>
+            <a:off x="0" y="658368"/>
+            <a:ext cx="5120640" cy="5833872"/>
+          </a:xfrm>
+          <a:prstGeom prst="rect">
+            <a:avLst/>
+          </a:prstGeom>
+        </p:spPr>
+      </p:pic>
+      <p:sp>
+        <p:nvSpPr>
+          <p:cNvPr id="4" name="Text 1"/>
+          <p:cNvSpPr/>
+          <p:nvPr/>
+        </p:nvSpPr>
+        <p:spPr>
+          <a:xfrm>
+            <a:off x="5349240" y="1005840"/>
+            <a:ext cx="6522415" cy="731520"/>
+          </a:xfrm>
+          <a:prstGeom prst="rect">
+            <a:avLst/>
+          </a:prstGeom>
+          <a:noFill/>
+          <a:ln/>
+        </p:spPr>
+        <p:txBody>
+          <a:bodyPr wrap="square" lIns="0" tIns="0" rIns="0" bIns="0" rtlCol="0" anchor="ctr">
+            <a:normAutofit/>
+          </a:bodyPr>
+          <a:lstStyle/>
+          <a:p>
+            <a:pPr algn="ctr" indent="0" marL="0">
+              <a:buNone/>
+            </a:pPr>
+            <a:r>
+              <a:rPr lang="en-US" sz="3600" b="1" dirty="0">
+                <a:solidFill>
+                  <a:srgbClr val="990011"/>
+                </a:solidFill>
+                <a:latin typeface="Times New Roman" pitchFamily="34" charset="0"/>
+                <a:ea typeface="Times New Roman" pitchFamily="34" charset="-122"/>
+                <a:cs typeface="Times New Roman" pitchFamily="34" charset="-120"/>
+              </a:rPr>
+              <a:t>Correction: Possible Answer</a:t>
+            </a:r>
+            <a:endParaRPr lang="en-US" sz="3600" dirty="0"/>
+          </a:p>
+        </p:txBody>
+      </p:sp>
+      <p:sp>
+        <p:nvSpPr>
+          <p:cNvPr id="5" name="Text 2"/>
+          <p:cNvSpPr/>
+          <p:nvPr/>
+        </p:nvSpPr>
+        <p:spPr>
+          <a:xfrm>
+            <a:off x="5349240" y="1783080"/>
+            <a:ext cx="6522415" cy="4663440"/>
+          </a:xfrm>
+          <a:prstGeom prst="rect">
+            <a:avLst/>
+          </a:prstGeom>
+          <a:noFill/>
+          <a:ln/>
+        </p:spPr>
+        <p:txBody>
+          <a:bodyPr wrap="square" lIns="0" tIns="0" rIns="0" bIns="0" rtlCol="0" anchor="t"/>
+          <a:lstStyle/>
+          <a:p>
+            <a:pPr algn="l" indent="0" marL="0">
+              <a:spcAft>
+                <a:spcPts val="800"/>
+              </a:spcAft>
+              <a:buNone/>
+            </a:pPr>
+            <a:r>
+              <a:rPr lang="en-US" sz="4000" dirty="0">
+                <a:solidFill>
+                  <a:srgbClr val="111111"/>
+                </a:solidFill>
+                <a:latin typeface="Times New Roman" pitchFamily="34" charset="0"/>
+                <a:ea typeface="Times New Roman" pitchFamily="34" charset="-122"/>
+                <a:cs typeface="Times New Roman" pitchFamily="34" charset="-120"/>
+              </a:rPr>
+              <a:t>Example: air pollution from old cars and burning waste (inspect vehicles, stop burning); water pollution from waste in the river (bins and sanitation).</a:t>
+            </a:r>
+            <a:endParaRPr lang="en-US" sz="4000" dirty="0"/>
+          </a:p>
+        </p:txBody>
+      </p:sp>
+      <p:sp>
+        <p:nvSpPr>
+          <p:cNvPr id="25" name="Slide Number Placeholder 0"/>
+          <p:cNvSpPr>
+            <a:spLocks noGrp="1"/>
+          </p:cNvSpPr>
+          <p:nvPr>
+            <p:ph type="sldNum" sz="quarter" idx="4294967295"/>
+          </p:nvPr>
+        </p:nvSpPr>
+        <p:spPr>
+          <a:xfrm>
+            <a:off x="27432" y="91440"/>
+            <a:ext cx="585216" cy="475488"/>
+          </a:xfrm>
+          <a:prstGeom prst="rect">
+            <a:avLst/>
+          </a:prstGeom>
+          <a:extLst>
+            <a:ext uri="{C572A759-6A51-4108-AA02-DFA0A04FC94B}">
+              <ma14:wrappingTextBoxFlag xmlns:ma14="http://schemas.microsoft.com/office/mac/drawingml/2011/main" val="0"/>
+            </a:ext>
+          </a:extLst>
+        </p:spPr>
+        <p:txBody>
+          <a:bodyPr/>
+          <a:lstStyle>
+            <a:lvl1pPr>
+              <a:defRPr sz="2000">
+                <a:solidFill>
+                  <a:srgbClr val="FFFFFF"/>
+                </a:solidFill>
+                <a:latin typeface="Calibri"/>
+                <a:ea typeface="Calibri"/>
+                <a:cs typeface="Calibri"/>
+              </a:defRPr>
+            </a:lvl1pPr>
+          </a:lstStyle>
+          <a:p>
+            <a:pPr algn="ctr"/>
+            <a:fld id="{F7021451-1387-4CA6-816F-3879F97B5CBC}" type="slidenum">
+              <a:rPr b="1" lang="en-US"/>
+              <a:t>5</a:t>
+            </a:fld>
+            <a:endParaRPr lang="en-US"/>
+          </a:p>
+        </p:txBody>
+      </p:sp>
+    </p:spTree>
+  </p:cSld>
+  <p:clrMapOvr>
+    <a:masterClrMapping/>
+  </p:clrMapOvr>
+</p:sld>
+</file>
+
+<file path=ppt/slides/slide50.xml><?xml version="1.0" encoding="utf-8"?>
+<p:sld xmlns:a="http://schemas.openxmlformats.org/drawingml/2006/main" xmlns:r="http://schemas.openxmlformats.org/officeDocument/2006/relationships" xmlns:p="http://schemas.openxmlformats.org/presentationml/2006/main">
+  <p:cSld name="Slide 50">
+    <p:spTree>
+      <p:nvGrpSpPr>
+        <p:cNvPr id="1" name=""/>
+        <p:cNvGrpSpPr/>
+        <p:nvPr/>
+      </p:nvGrpSpPr>
+      <p:grpSpPr>
+        <a:xfrm>
+          <a:off x="0" y="0"/>
+          <a:ext cx="0" cy="0"/>
+          <a:chOff x="0" y="0"/>
+          <a:chExt cx="0" cy="0"/>
+        </a:xfrm>
+      </p:grpSpPr>
+      <p:sp>
+        <p:nvSpPr>
+          <p:cNvPr id="2" name="Text 0"/>
+          <p:cNvSpPr/>
+          <p:nvPr/>
+        </p:nvSpPr>
+        <p:spPr>
+          <a:xfrm>
+            <a:off x="457200" y="713232"/>
+            <a:ext cx="11368735" cy="274320"/>
+          </a:xfrm>
+          <a:prstGeom prst="rect">
+            <a:avLst/>
+          </a:prstGeom>
+          <a:noFill/>
+          <a:ln/>
+        </p:spPr>
+        <p:txBody>
+          <a:bodyPr wrap="square" lIns="0" tIns="0" rIns="0" bIns="0" rtlCol="0" anchor="ctr"/>
+          <a:lstStyle/>
+          <a:p>
+            <a:pPr algn="r" indent="0" marL="0">
+              <a:buNone/>
+            </a:pPr>
+            <a:r>
+              <a:rPr lang="en-US" sz="1400" b="1" dirty="0">
+                <a:solidFill>
+                  <a:srgbClr val="1C3F6E"/>
+                </a:solidFill>
+                <a:latin typeface="Calibri" pitchFamily="34" charset="0"/>
+                <a:ea typeface="Calibri" pitchFamily="34" charset="-122"/>
+                <a:cs typeface="Calibri" pitchFamily="34" charset="-120"/>
+              </a:rPr>
               <a:t>LOGBOOK</a:t>
             </a:r>
             <a:endParaRPr lang="en-US" sz="1400" dirty="0"/>
@@ -18172,7 +19217,7 @@
       </p:sp>
       <p:graphicFrame>
         <p:nvGraphicFramePr>
-          <p:cNvPr id="49" name="Table 0"/>
+          <p:cNvPr id="51" name="Table 0"/>
           <p:cNvGraphicFramePr>
             <a:graphicFrameLocks noGrp="1"/>
           </p:cNvGraphicFramePr>
@@ -18282,7 +19327,7 @@
                           <a:ea typeface="Calibri" pitchFamily="34" charset="-122"/>
                           <a:cs typeface="Calibri" pitchFamily="34" charset="-120"/>
                         </a:rPr>
-                        <a:t>DEFINITIONS; Evolution of the World Population.</a:t>
+                        <a:t>DEFINITIONS; Stages of Growth; Causes of Rapid Growth.</a:t>
                       </a:r>
                       <a:endParaRPr lang="en-US" sz="1600" dirty="0">
                         <a:latin typeface="Calibri" charset="0"/>
@@ -18932,7 +19977,7 @@
             <a:pPr algn="ctr"/>
             <a:fld id="{F7021451-1387-4CA6-816F-3879F97B5CBC}" type="slidenum">
               <a:rPr b="1" lang="en-US"/>
-              <a:t>48</a:t>
+              <a:t>50</a:t>
             </a:fld>
             <a:endParaRPr lang="en-US"/>
           </a:p>
@@ -18946,9 +19991,9 @@
 </p:sld>
 </file>
 
-<file path=ppt/slides/slide49.xml><?xml version="1.0" encoding="utf-8"?>
+<file path=ppt/slides/slide51.xml><?xml version="1.0" encoding="utf-8"?>
 <p:sld xmlns:a="http://schemas.openxmlformats.org/drawingml/2006/main" xmlns:r="http://schemas.openxmlformats.org/officeDocument/2006/relationships" xmlns:p="http://schemas.openxmlformats.org/presentationml/2006/main">
-  <p:cSld name="Slide 49">
+  <p:cSld name="Slide 51">
     <p:spTree>
       <p:nvGrpSpPr>
         <p:cNvPr id="1" name=""/>
@@ -19257,7 +20302,7 @@
             <a:pPr algn="ctr"/>
             <a:fld id="{F7021451-1387-4CA6-816F-3879F97B5CBC}" type="slidenum">
               <a:rPr b="1" lang="en-US"/>
-              <a:t>49</a:t>
+              <a:t>51</a:t>
             </a:fld>
             <a:endParaRPr lang="en-US"/>
           </a:p>
@@ -19271,9 +20316,9 @@
 </p:sld>
 </file>
 
-<file path=ppt/slides/slide5.xml><?xml version="1.0" encoding="utf-8"?>
+<file path=ppt/slides/slide52.xml><?xml version="1.0" encoding="utf-8"?>
 <p:sld xmlns:a="http://schemas.openxmlformats.org/drawingml/2006/main" xmlns:r="http://schemas.openxmlformats.org/officeDocument/2006/relationships" xmlns:p="http://schemas.openxmlformats.org/presentationml/2006/main">
-  <p:cSld name="Slide 5">
+  <p:cSld name="Slide 52">
     <p:spTree>
       <p:nvGrpSpPr>
         <p:cNvPr id="1" name=""/>
@@ -19321,7 +20366,7 @@
                 <a:ea typeface="Calibri" pitchFamily="34" charset="-122"/>
                 <a:cs typeface="Calibri" pitchFamily="34" charset="-120"/>
               </a:rPr>
-              <a:t>HOMEWORK CORRECTION</a:t>
+              <a:t>REFERENCES</a:t>
             </a:r>
             <a:endParaRPr lang="en-US" sz="1400" dirty="0"/>
           </a:p>
@@ -19386,7 +20431,7 @@
                 <a:ea typeface="Times New Roman" pitchFamily="34" charset="-122"/>
                 <a:cs typeface="Times New Roman" pitchFamily="34" charset="-120"/>
               </a:rPr>
-              <a:t>Correction: Possible Answer</a:t>
+              <a:t>References</a:t>
             </a:r>
             <a:endParaRPr lang="en-US" sz="3600" dirty="0"/>
           </a:p>
@@ -19413,24 +20458,88 @@
           <a:bodyPr wrap="square" lIns="0" tIns="0" rIns="0" bIns="0" rtlCol="0" anchor="t"/>
           <a:lstStyle/>
           <a:p>
-            <a:pPr algn="l" indent="0" marL="0">
+            <a:pPr algn="l" marL="342900" indent="-342900">
               <a:spcAft>
                 <a:spcPts val="800"/>
               </a:spcAft>
-              <a:buNone/>
+              <a:buSzPct val="100000"/>
+              <a:buChar char="•"/>
             </a:pPr>
             <a:r>
-              <a:rPr lang="en-US" sz="4000" dirty="0">
+              <a:rPr lang="en-US" sz="1800" dirty="0">
                 <a:solidFill>
                   <a:srgbClr val="111111"/>
                 </a:solidFill>
-                <a:latin typeface="Times New Roman" pitchFamily="34" charset="0"/>
-                <a:ea typeface="Times New Roman" pitchFamily="34" charset="-122"/>
-                <a:cs typeface="Times New Roman" pitchFamily="34" charset="-120"/>
+                <a:latin typeface="Calibri" pitchFamily="34" charset="0"/>
+                <a:ea typeface="Calibri" pitchFamily="34" charset="-122"/>
+                <a:cs typeface="Calibri" pitchFamily="34" charset="-120"/>
               </a:rPr>
-              <a:t>Example: air pollution from old cars and burning waste (inspect vehicles, stop burning); water pollution from waste in the river (bins and sanitation).</a:t>
-            </a:r>
-            <a:endParaRPr lang="en-US" sz="4000" dirty="0"/>
+              <a:t>Geography Syllabus, Forms I–V, MINESEC (2023) — Form 5, Module III: Management of Population Growth and Space Colonisation.</a:t>
+            </a:r>
+            <a:endParaRPr lang="en-US" sz="1800" dirty="0"/>
+          </a:p>
+          <a:p>
+            <a:pPr algn="l" marL="342900" indent="-342900">
+              <a:spcAft>
+                <a:spcPts val="800"/>
+              </a:spcAft>
+              <a:buSzPct val="100000"/>
+              <a:buChar char="•"/>
+            </a:pPr>
+            <a:r>
+              <a:rPr lang="en-US" sz="1800" dirty="0">
+                <a:solidFill>
+                  <a:srgbClr val="111111"/>
+                </a:solidFill>
+                <a:latin typeface="Calibri" pitchFamily="34" charset="0"/>
+                <a:ea typeface="Calibri" pitchFamily="34" charset="-122"/>
+                <a:cs typeface="Calibri" pitchFamily="34" charset="-120"/>
+              </a:rPr>
+              <a:t>Photo, Activity 1: “Wax market” by zouzouwizman, CC BY 2.0, via Flickr (https://www.flickr.com/photos/61111202@N00/12129001)</a:t>
+            </a:r>
+            <a:endParaRPr lang="en-US" sz="1800" dirty="0"/>
+          </a:p>
+          <a:p>
+            <a:pPr algn="l" marL="342900" indent="-342900">
+              <a:spcAft>
+                <a:spcPts val="800"/>
+              </a:spcAft>
+              <a:buSzPct val="100000"/>
+              <a:buChar char="•"/>
+            </a:pPr>
+            <a:r>
+              <a:rPr lang="en-US" sz="1800" dirty="0">
+                <a:solidFill>
+                  <a:srgbClr val="111111"/>
+                </a:solidFill>
+                <a:latin typeface="Calibri" pitchFamily="34" charset="0"/>
+                <a:ea typeface="Calibri" pitchFamily="34" charset="-122"/>
+                <a:cs typeface="Calibri" pitchFamily="34" charset="-120"/>
+              </a:rPr>
+              <a:t>Photo, Activity 5: “Isatu gets a vaccination for her 5 week old son” by World Bank Photo Collection, CC BY-NC-ND 2.0, via Flickr (https://www.flickr.com/photos/10816734@N03/26372818523)</a:t>
+            </a:r>
+            <a:endParaRPr lang="en-US" sz="1800" dirty="0"/>
+          </a:p>
+          <a:p>
+            <a:pPr algn="l" marL="342900" indent="-342900">
+              <a:spcAft>
+                <a:spcPts val="800"/>
+              </a:spcAft>
+              <a:buSzPct val="100000"/>
+              <a:buChar char="•"/>
+            </a:pPr>
+            <a:r>
+              <a:rPr lang="en-US" sz="1800" dirty="0">
+                <a:solidFill>
+                  <a:srgbClr val="111111"/>
+                </a:solidFill>
+                <a:latin typeface="Calibri" pitchFamily="34" charset="0"/>
+                <a:ea typeface="Calibri" pitchFamily="34" charset="-122"/>
+                <a:cs typeface="Calibri" pitchFamily="34" charset="-120"/>
+              </a:rPr>
+              <a:t>Diagrams and animations: drawn for this lesson (Geography Department).</a:t>
+            </a:r>
+            <a:endParaRPr lang="en-US" sz="1800" dirty="0"/>
           </a:p>
         </p:txBody>
       </p:sp>
@@ -19476,290 +20585,7 @@
             <a:pPr algn="ctr"/>
             <a:fld id="{F7021451-1387-4CA6-816F-3879F97B5CBC}" type="slidenum">
               <a:rPr b="1" lang="en-US"/>
-              <a:t>5</a:t>
-            </a:fld>
-            <a:endParaRPr lang="en-US"/>
-          </a:p>
-        </p:txBody>
-      </p:sp>
-    </p:spTree>
-  </p:cSld>
-  <p:clrMapOvr>
-    <a:masterClrMapping/>
-  </p:clrMapOvr>
-</p:sld>
-</file>
-
-<file path=ppt/slides/slide50.xml><?xml version="1.0" encoding="utf-8"?>
-<p:sld xmlns:a="http://schemas.openxmlformats.org/drawingml/2006/main" xmlns:r="http://schemas.openxmlformats.org/officeDocument/2006/relationships" xmlns:p="http://schemas.openxmlformats.org/presentationml/2006/main">
-  <p:cSld name="Slide 50">
-    <p:spTree>
-      <p:nvGrpSpPr>
-        <p:cNvPr id="1" name=""/>
-        <p:cNvGrpSpPr/>
-        <p:nvPr/>
-      </p:nvGrpSpPr>
-      <p:grpSpPr>
-        <a:xfrm>
-          <a:off x="0" y="0"/>
-          <a:ext cx="0" cy="0"/>
-          <a:chOff x="0" y="0"/>
-          <a:chExt cx="0" cy="0"/>
-        </a:xfrm>
-      </p:grpSpPr>
-      <p:sp>
-        <p:nvSpPr>
-          <p:cNvPr id="2" name="Text 0"/>
-          <p:cNvSpPr/>
-          <p:nvPr/>
-        </p:nvSpPr>
-        <p:spPr>
-          <a:xfrm>
-            <a:off x="457200" y="713232"/>
-            <a:ext cx="11368735" cy="274320"/>
-          </a:xfrm>
-          <a:prstGeom prst="rect">
-            <a:avLst/>
-          </a:prstGeom>
-          <a:noFill/>
-          <a:ln/>
-        </p:spPr>
-        <p:txBody>
-          <a:bodyPr wrap="square" lIns="0" tIns="0" rIns="0" bIns="0" rtlCol="0" anchor="ctr"/>
-          <a:lstStyle/>
-          <a:p>
-            <a:pPr algn="r" indent="0" marL="0">
-              <a:buNone/>
-            </a:pPr>
-            <a:r>
-              <a:rPr lang="en-US" sz="1400" b="1" dirty="0">
-                <a:solidFill>
-                  <a:srgbClr val="1C3F6E"/>
-                </a:solidFill>
-                <a:latin typeface="Calibri" pitchFamily="34" charset="0"/>
-                <a:ea typeface="Calibri" pitchFamily="34" charset="-122"/>
-                <a:cs typeface="Calibri" pitchFamily="34" charset="-120"/>
-              </a:rPr>
-              <a:t>REFERENCES</a:t>
-            </a:r>
-            <a:endParaRPr lang="en-US" sz="1400" dirty="0"/>
-          </a:p>
-        </p:txBody>
-      </p:sp>
-      <p:pic>
-        <p:nvPicPr>
-          <p:cNvPr id="3" name="Image 0" descr="/home/claude/f4/img/minesec_sheet.png">    </p:cNvPr>
-          <p:cNvPicPr>
-            <a:picLocks noChangeAspect="1"/>
-          </p:cNvPicPr>
-          <p:nvPr/>
-        </p:nvPicPr>
-        <p:blipFill>
-          <a:blip r:embed="rId1"/>
-          <a:stretch>
-            <a:fillRect/>
-          </a:stretch>
-        </p:blipFill>
-        <p:spPr>
-          <a:xfrm>
-            <a:off x="0" y="658368"/>
-            <a:ext cx="5120640" cy="5833872"/>
-          </a:xfrm>
-          <a:prstGeom prst="rect">
-            <a:avLst/>
-          </a:prstGeom>
-        </p:spPr>
-      </p:pic>
-      <p:sp>
-        <p:nvSpPr>
-          <p:cNvPr id="4" name="Text 1"/>
-          <p:cNvSpPr/>
-          <p:nvPr/>
-        </p:nvSpPr>
-        <p:spPr>
-          <a:xfrm>
-            <a:off x="5349240" y="1005840"/>
-            <a:ext cx="6522415" cy="731520"/>
-          </a:xfrm>
-          <a:prstGeom prst="rect">
-            <a:avLst/>
-          </a:prstGeom>
-          <a:noFill/>
-          <a:ln/>
-        </p:spPr>
-        <p:txBody>
-          <a:bodyPr wrap="square" lIns="0" tIns="0" rIns="0" bIns="0" rtlCol="0" anchor="ctr">
-            <a:normAutofit/>
-          </a:bodyPr>
-          <a:lstStyle/>
-          <a:p>
-            <a:pPr algn="ctr" indent="0" marL="0">
-              <a:buNone/>
-            </a:pPr>
-            <a:r>
-              <a:rPr lang="en-US" sz="3600" b="1" dirty="0">
-                <a:solidFill>
-                  <a:srgbClr val="990011"/>
-                </a:solidFill>
-                <a:latin typeface="Times New Roman" pitchFamily="34" charset="0"/>
-                <a:ea typeface="Times New Roman" pitchFamily="34" charset="-122"/>
-                <a:cs typeface="Times New Roman" pitchFamily="34" charset="-120"/>
-              </a:rPr>
-              <a:t>References</a:t>
-            </a:r>
-            <a:endParaRPr lang="en-US" sz="3600" dirty="0"/>
-          </a:p>
-        </p:txBody>
-      </p:sp>
-      <p:sp>
-        <p:nvSpPr>
-          <p:cNvPr id="5" name="Text 2"/>
-          <p:cNvSpPr/>
-          <p:nvPr/>
-        </p:nvSpPr>
-        <p:spPr>
-          <a:xfrm>
-            <a:off x="5349240" y="1783080"/>
-            <a:ext cx="6522415" cy="4663440"/>
-          </a:xfrm>
-          <a:prstGeom prst="rect">
-            <a:avLst/>
-          </a:prstGeom>
-          <a:noFill/>
-          <a:ln/>
-        </p:spPr>
-        <p:txBody>
-          <a:bodyPr wrap="square" lIns="0" tIns="0" rIns="0" bIns="0" rtlCol="0" anchor="t"/>
-          <a:lstStyle/>
-          <a:p>
-            <a:pPr algn="l" marL="342900" indent="-342900">
-              <a:spcAft>
-                <a:spcPts val="800"/>
-              </a:spcAft>
-              <a:buSzPct val="100000"/>
-              <a:buChar char="•"/>
-            </a:pPr>
-            <a:r>
-              <a:rPr lang="en-US" sz="1800" dirty="0">
-                <a:solidFill>
-                  <a:srgbClr val="111111"/>
-                </a:solidFill>
-                <a:latin typeface="Calibri" pitchFamily="34" charset="0"/>
-                <a:ea typeface="Calibri" pitchFamily="34" charset="-122"/>
-                <a:cs typeface="Calibri" pitchFamily="34" charset="-120"/>
-              </a:rPr>
-              <a:t>Geography Syllabus, Forms I–V, MINESEC (2023) — Form 5, Module III: Management of Population Growth and Space Colonisation.</a:t>
-            </a:r>
-            <a:endParaRPr lang="en-US" sz="1800" dirty="0"/>
-          </a:p>
-          <a:p>
-            <a:pPr algn="l" marL="342900" indent="-342900">
-              <a:spcAft>
-                <a:spcPts val="800"/>
-              </a:spcAft>
-              <a:buSzPct val="100000"/>
-              <a:buChar char="•"/>
-            </a:pPr>
-            <a:r>
-              <a:rPr lang="en-US" sz="1800" dirty="0">
-                <a:solidFill>
-                  <a:srgbClr val="111111"/>
-                </a:solidFill>
-                <a:latin typeface="Calibri" pitchFamily="34" charset="0"/>
-                <a:ea typeface="Calibri" pitchFamily="34" charset="-122"/>
-                <a:cs typeface="Calibri" pitchFamily="34" charset="-120"/>
-              </a:rPr>
-              <a:t>Photo, Activity 1: “Wax market” by zouzouwizman, CC BY 2.0, via Flickr (https://www.flickr.com/photos/61111202@N00/12129001)</a:t>
-            </a:r>
-            <a:endParaRPr lang="en-US" sz="1800" dirty="0"/>
-          </a:p>
-          <a:p>
-            <a:pPr algn="l" marL="342900" indent="-342900">
-              <a:spcAft>
-                <a:spcPts val="800"/>
-              </a:spcAft>
-              <a:buSzPct val="100000"/>
-              <a:buChar char="•"/>
-            </a:pPr>
-            <a:r>
-              <a:rPr lang="en-US" sz="1800" dirty="0">
-                <a:solidFill>
-                  <a:srgbClr val="111111"/>
-                </a:solidFill>
-                <a:latin typeface="Calibri" pitchFamily="34" charset="0"/>
-                <a:ea typeface="Calibri" pitchFamily="34" charset="-122"/>
-                <a:cs typeface="Calibri" pitchFamily="34" charset="-120"/>
-              </a:rPr>
-              <a:t>Photo, Activity 5: “Isatu gets a vaccination for her 5 week old son” by World Bank Photo Collection, CC BY-NC-ND 2.0, via Flickr (https://www.flickr.com/photos/10816734@N03/26372818523)</a:t>
-            </a:r>
-            <a:endParaRPr lang="en-US" sz="1800" dirty="0"/>
-          </a:p>
-          <a:p>
-            <a:pPr algn="l" marL="342900" indent="-342900">
-              <a:spcAft>
-                <a:spcPts val="800"/>
-              </a:spcAft>
-              <a:buSzPct val="100000"/>
-              <a:buChar char="•"/>
-            </a:pPr>
-            <a:r>
-              <a:rPr lang="en-US" sz="1800" dirty="0">
-                <a:solidFill>
-                  <a:srgbClr val="111111"/>
-                </a:solidFill>
-                <a:latin typeface="Calibri" pitchFamily="34" charset="0"/>
-                <a:ea typeface="Calibri" pitchFamily="34" charset="-122"/>
-                <a:cs typeface="Calibri" pitchFamily="34" charset="-120"/>
-              </a:rPr>
-              <a:t>Diagrams and animations: drawn for this lesson (Geography Department).</a:t>
-            </a:r>
-            <a:endParaRPr lang="en-US" sz="1800" dirty="0"/>
-          </a:p>
-        </p:txBody>
-      </p:sp>
-      <p:sp>
-        <p:nvSpPr>
-          <p:cNvPr id="25" name="Slide Number Placeholder 0"/>
-          <p:cNvSpPr>
-            <a:spLocks noGrp="1"/>
-          </p:cNvSpPr>
-          <p:nvPr>
-            <p:ph type="sldNum" sz="quarter" idx="4294967295"/>
-          </p:nvPr>
-        </p:nvSpPr>
-        <p:spPr>
-          <a:xfrm>
-            <a:off x="27432" y="91440"/>
-            <a:ext cx="585216" cy="475488"/>
-          </a:xfrm>
-          <a:prstGeom prst="rect">
-            <a:avLst/>
-          </a:prstGeom>
-          <a:extLst>
-            <a:ext uri="{C572A759-6A51-4108-AA02-DFA0A04FC94B}">
-              <ma14:wrappingTextBoxFlag xmlns:ma14="http://schemas.microsoft.com/office/mac/drawingml/2011/main" val="0"/>
-            </a:ext>
-          </a:extLst>
-        </p:spPr>
-        <p:txBody>
-          <a:bodyPr/>
-          <a:lstStyle>
-            <a:lvl1pPr>
-              <a:defRPr sz="2000">
-                <a:solidFill>
-                  <a:srgbClr val="FFFFFF"/>
-                </a:solidFill>
-                <a:latin typeface="Calibri"/>
-                <a:ea typeface="Calibri"/>
-                <a:cs typeface="Calibri"/>
-              </a:defRPr>
-            </a:lvl1pPr>
-          </a:lstStyle>
-          <a:p>
-            <a:pPr algn="ctr"/>
-            <a:fld id="{F7021451-1387-4CA6-816F-3879F97B5CBC}" type="slidenum">
-              <a:rPr b="1" lang="en-US"/>
-              <a:t>50</a:t>
+              <a:t>52</a:t>
             </a:fld>
             <a:endParaRPr lang="en-US"/>
           </a:p>
